--- a/exports/pptx/lessons/senior-module-08-yoga/day-05-pranayama.pptx
+++ b/exports/pptx/lessons/senior-module-08-yoga/day-05-pranayama.pptx
@@ -16,9 +16,13 @@
     <p:sldId id="264" r:id="rId10"/>
     <p:sldId id="265" r:id="rId11"/>
     <p:sldId id="266" r:id="rId12"/>
+    <p:sldId id="267" r:id="rId13"/>
+    <p:sldId id="268" r:id="rId14"/>
+    <p:sldId id="269" r:id="rId15"/>
+    <p:sldId id="270" r:id="rId16"/>
   </p:sldIdLst>
   <p:notesMasterIdLst>
-    <p:notesMasterId r:id="rId13"/>
+    <p:notesMasterId r:id="rId17"/>
   </p:notesMasterIdLst>
   <p:sldSz cx="9144000" cy="5143500"/>
   <p:notesSz cx="5143500" cy="9144000"/>
@@ -712,6 +716,358 @@
             <a:fld id="{F7021451-1387-4CA6-816F-3879F97B5CBC}" type="slidenum">
               <a:rPr lang="en-US"/>
               <a:t>11</a:t>
+            </a:fld>
+            <a:endParaRPr lang="en-US"/>
+          </a:p>
+        </p:txBody>
+      </p:sp>
+    </p:spTree>
+    <p:extLst>
+      <p:ext uri="{BB962C8B-B14F-4D97-AF65-F5344CB8AC3E}">
+        <p14:creationId xmlns:p14="http://schemas.microsoft.com/office/powerpoint/2010/main" val="1024086991"/>
+      </p:ext>
+    </p:extLst>
+  </p:cSld>
+  <p:clrMapOvr>
+    <a:masterClrMapping/>
+  </p:clrMapOvr>
+</p:notes>
+</file>
+
+<file path=ppt/notesSlides/notesSlide12.xml><?xml version="1.0" encoding="utf-8"?>
+<p:notes xmlns:a="http://schemas.openxmlformats.org/drawingml/2006/main" xmlns:r="http://schemas.openxmlformats.org/officeDocument/2006/relationships" xmlns:p="http://schemas.openxmlformats.org/presentationml/2006/main">
+  <p:cSld>
+    <p:spTree>
+      <p:nvGrpSpPr>
+        <p:cNvPr id="1" name=""/>
+        <p:cNvGrpSpPr/>
+        <p:nvPr/>
+      </p:nvGrpSpPr>
+      <p:grpSpPr>
+        <a:xfrm>
+          <a:off x="0" y="0"/>
+          <a:ext cx="0" cy="0"/>
+          <a:chOff x="0" y="0"/>
+          <a:chExt cx="0" cy="0"/>
+        </a:xfrm>
+      </p:grpSpPr>
+      <p:sp>
+        <p:nvSpPr>
+          <p:cNvPr id="2" name="Slide Image Placeholder 1"/>
+          <p:cNvSpPr>
+            <a:spLocks noGrp="1" noRot="1" noChangeAspect="1"/>
+          </p:cNvSpPr>
+          <p:nvPr>
+            <p:ph type="sldImg"/>
+          </p:nvPr>
+        </p:nvSpPr>
+        <p:spPr/>
+      </p:sp>
+      <p:sp>
+        <p:nvSpPr>
+          <p:cNvPr id="3" name="Notes Placeholder 2"/>
+          <p:cNvSpPr>
+            <a:spLocks noGrp="1"/>
+          </p:cNvSpPr>
+          <p:nvPr>
+            <p:ph type="body" idx="1"/>
+          </p:nvPr>
+        </p:nvSpPr>
+        <p:spPr/>
+        <p:txBody>
+          <a:bodyPr/>
+          <a:lstStyle/>
+          <a:p>
+            <a:r>
+              <a:rPr lang="en-US" dirty="0"/>
+              <a:t/>
+            </a:r>
+            <a:endParaRPr lang="en-US" dirty="0"/>
+          </a:p>
+        </p:txBody>
+      </p:sp>
+      <p:sp>
+        <p:nvSpPr>
+          <p:cNvPr id="4" name="Slide Number Placeholder 3"/>
+          <p:cNvSpPr>
+            <a:spLocks noGrp="1"/>
+          </p:cNvSpPr>
+          <p:nvPr>
+            <p:ph type="sldNum" sz="quarter" idx="10"/>
+          </p:nvPr>
+        </p:nvSpPr>
+        <p:spPr/>
+        <p:txBody>
+          <a:bodyPr/>
+          <a:lstStyle/>
+          <a:p>
+            <a:fld id="{F7021451-1387-4CA6-816F-3879F97B5CBC}" type="slidenum">
+              <a:rPr lang="en-US"/>
+              <a:t>12</a:t>
+            </a:fld>
+            <a:endParaRPr lang="en-US"/>
+          </a:p>
+        </p:txBody>
+      </p:sp>
+    </p:spTree>
+    <p:extLst>
+      <p:ext uri="{BB962C8B-B14F-4D97-AF65-F5344CB8AC3E}">
+        <p14:creationId xmlns:p14="http://schemas.microsoft.com/office/powerpoint/2010/main" val="1024086991"/>
+      </p:ext>
+    </p:extLst>
+  </p:cSld>
+  <p:clrMapOvr>
+    <a:masterClrMapping/>
+  </p:clrMapOvr>
+</p:notes>
+</file>
+
+<file path=ppt/notesSlides/notesSlide13.xml><?xml version="1.0" encoding="utf-8"?>
+<p:notes xmlns:a="http://schemas.openxmlformats.org/drawingml/2006/main" xmlns:r="http://schemas.openxmlformats.org/officeDocument/2006/relationships" xmlns:p="http://schemas.openxmlformats.org/presentationml/2006/main">
+  <p:cSld>
+    <p:spTree>
+      <p:nvGrpSpPr>
+        <p:cNvPr id="1" name=""/>
+        <p:cNvGrpSpPr/>
+        <p:nvPr/>
+      </p:nvGrpSpPr>
+      <p:grpSpPr>
+        <a:xfrm>
+          <a:off x="0" y="0"/>
+          <a:ext cx="0" cy="0"/>
+          <a:chOff x="0" y="0"/>
+          <a:chExt cx="0" cy="0"/>
+        </a:xfrm>
+      </p:grpSpPr>
+      <p:sp>
+        <p:nvSpPr>
+          <p:cNvPr id="2" name="Slide Image Placeholder 1"/>
+          <p:cNvSpPr>
+            <a:spLocks noGrp="1" noRot="1" noChangeAspect="1"/>
+          </p:cNvSpPr>
+          <p:nvPr>
+            <p:ph type="sldImg"/>
+          </p:nvPr>
+        </p:nvSpPr>
+        <p:spPr/>
+      </p:sp>
+      <p:sp>
+        <p:nvSpPr>
+          <p:cNvPr id="3" name="Notes Placeholder 2"/>
+          <p:cNvSpPr>
+            <a:spLocks noGrp="1"/>
+          </p:cNvSpPr>
+          <p:nvPr>
+            <p:ph type="body" idx="1"/>
+          </p:nvPr>
+        </p:nvSpPr>
+        <p:spPr/>
+        <p:txBody>
+          <a:bodyPr/>
+          <a:lstStyle/>
+          <a:p>
+            <a:r>
+              <a:rPr lang="en-US" dirty="0"/>
+              <a:t/>
+            </a:r>
+            <a:endParaRPr lang="en-US" dirty="0"/>
+          </a:p>
+        </p:txBody>
+      </p:sp>
+      <p:sp>
+        <p:nvSpPr>
+          <p:cNvPr id="4" name="Slide Number Placeholder 3"/>
+          <p:cNvSpPr>
+            <a:spLocks noGrp="1"/>
+          </p:cNvSpPr>
+          <p:nvPr>
+            <p:ph type="sldNum" sz="quarter" idx="10"/>
+          </p:nvPr>
+        </p:nvSpPr>
+        <p:spPr/>
+        <p:txBody>
+          <a:bodyPr/>
+          <a:lstStyle/>
+          <a:p>
+            <a:fld id="{F7021451-1387-4CA6-816F-3879F97B5CBC}" type="slidenum">
+              <a:rPr lang="en-US"/>
+              <a:t>13</a:t>
+            </a:fld>
+            <a:endParaRPr lang="en-US"/>
+          </a:p>
+        </p:txBody>
+      </p:sp>
+    </p:spTree>
+    <p:extLst>
+      <p:ext uri="{BB962C8B-B14F-4D97-AF65-F5344CB8AC3E}">
+        <p14:creationId xmlns:p14="http://schemas.microsoft.com/office/powerpoint/2010/main" val="1024086991"/>
+      </p:ext>
+    </p:extLst>
+  </p:cSld>
+  <p:clrMapOvr>
+    <a:masterClrMapping/>
+  </p:clrMapOvr>
+</p:notes>
+</file>
+
+<file path=ppt/notesSlides/notesSlide14.xml><?xml version="1.0" encoding="utf-8"?>
+<p:notes xmlns:a="http://schemas.openxmlformats.org/drawingml/2006/main" xmlns:r="http://schemas.openxmlformats.org/officeDocument/2006/relationships" xmlns:p="http://schemas.openxmlformats.org/presentationml/2006/main">
+  <p:cSld>
+    <p:spTree>
+      <p:nvGrpSpPr>
+        <p:cNvPr id="1" name=""/>
+        <p:cNvGrpSpPr/>
+        <p:nvPr/>
+      </p:nvGrpSpPr>
+      <p:grpSpPr>
+        <a:xfrm>
+          <a:off x="0" y="0"/>
+          <a:ext cx="0" cy="0"/>
+          <a:chOff x="0" y="0"/>
+          <a:chExt cx="0" cy="0"/>
+        </a:xfrm>
+      </p:grpSpPr>
+      <p:sp>
+        <p:nvSpPr>
+          <p:cNvPr id="2" name="Slide Image Placeholder 1"/>
+          <p:cNvSpPr>
+            <a:spLocks noGrp="1" noRot="1" noChangeAspect="1"/>
+          </p:cNvSpPr>
+          <p:nvPr>
+            <p:ph type="sldImg"/>
+          </p:nvPr>
+        </p:nvSpPr>
+        <p:spPr/>
+      </p:sp>
+      <p:sp>
+        <p:nvSpPr>
+          <p:cNvPr id="3" name="Notes Placeholder 2"/>
+          <p:cNvSpPr>
+            <a:spLocks noGrp="1"/>
+          </p:cNvSpPr>
+          <p:nvPr>
+            <p:ph type="body" idx="1"/>
+          </p:nvPr>
+        </p:nvSpPr>
+        <p:spPr/>
+        <p:txBody>
+          <a:bodyPr/>
+          <a:lstStyle/>
+          <a:p>
+            <a:r>
+              <a:rPr lang="en-US" dirty="0"/>
+              <a:t/>
+            </a:r>
+            <a:endParaRPr lang="en-US" dirty="0"/>
+          </a:p>
+        </p:txBody>
+      </p:sp>
+      <p:sp>
+        <p:nvSpPr>
+          <p:cNvPr id="4" name="Slide Number Placeholder 3"/>
+          <p:cNvSpPr>
+            <a:spLocks noGrp="1"/>
+          </p:cNvSpPr>
+          <p:nvPr>
+            <p:ph type="sldNum" sz="quarter" idx="10"/>
+          </p:nvPr>
+        </p:nvSpPr>
+        <p:spPr/>
+        <p:txBody>
+          <a:bodyPr/>
+          <a:lstStyle/>
+          <a:p>
+            <a:fld id="{F7021451-1387-4CA6-816F-3879F97B5CBC}" type="slidenum">
+              <a:rPr lang="en-US"/>
+              <a:t>14</a:t>
+            </a:fld>
+            <a:endParaRPr lang="en-US"/>
+          </a:p>
+        </p:txBody>
+      </p:sp>
+    </p:spTree>
+    <p:extLst>
+      <p:ext uri="{BB962C8B-B14F-4D97-AF65-F5344CB8AC3E}">
+        <p14:creationId xmlns:p14="http://schemas.microsoft.com/office/powerpoint/2010/main" val="1024086991"/>
+      </p:ext>
+    </p:extLst>
+  </p:cSld>
+  <p:clrMapOvr>
+    <a:masterClrMapping/>
+  </p:clrMapOvr>
+</p:notes>
+</file>
+
+<file path=ppt/notesSlides/notesSlide15.xml><?xml version="1.0" encoding="utf-8"?>
+<p:notes xmlns:a="http://schemas.openxmlformats.org/drawingml/2006/main" xmlns:r="http://schemas.openxmlformats.org/officeDocument/2006/relationships" xmlns:p="http://schemas.openxmlformats.org/presentationml/2006/main">
+  <p:cSld>
+    <p:spTree>
+      <p:nvGrpSpPr>
+        <p:cNvPr id="1" name=""/>
+        <p:cNvGrpSpPr/>
+        <p:nvPr/>
+      </p:nvGrpSpPr>
+      <p:grpSpPr>
+        <a:xfrm>
+          <a:off x="0" y="0"/>
+          <a:ext cx="0" cy="0"/>
+          <a:chOff x="0" y="0"/>
+          <a:chExt cx="0" cy="0"/>
+        </a:xfrm>
+      </p:grpSpPr>
+      <p:sp>
+        <p:nvSpPr>
+          <p:cNvPr id="2" name="Slide Image Placeholder 1"/>
+          <p:cNvSpPr>
+            <a:spLocks noGrp="1" noRot="1" noChangeAspect="1"/>
+          </p:cNvSpPr>
+          <p:nvPr>
+            <p:ph type="sldImg"/>
+          </p:nvPr>
+        </p:nvSpPr>
+        <p:spPr/>
+      </p:sp>
+      <p:sp>
+        <p:nvSpPr>
+          <p:cNvPr id="3" name="Notes Placeholder 2"/>
+          <p:cNvSpPr>
+            <a:spLocks noGrp="1"/>
+          </p:cNvSpPr>
+          <p:nvPr>
+            <p:ph type="body" idx="1"/>
+          </p:nvPr>
+        </p:nvSpPr>
+        <p:spPr/>
+        <p:txBody>
+          <a:bodyPr/>
+          <a:lstStyle/>
+          <a:p>
+            <a:r>
+              <a:rPr lang="en-US" dirty="0"/>
+              <a:t/>
+            </a:r>
+            <a:endParaRPr lang="en-US" dirty="0"/>
+          </a:p>
+        </p:txBody>
+      </p:sp>
+      <p:sp>
+        <p:nvSpPr>
+          <p:cNvPr id="4" name="Slide Number Placeholder 3"/>
+          <p:cNvSpPr>
+            <a:spLocks noGrp="1"/>
+          </p:cNvSpPr>
+          <p:nvPr>
+            <p:ph type="sldNum" sz="quarter" idx="10"/>
+          </p:nvPr>
+        </p:nvSpPr>
+        <p:spPr/>
+        <p:txBody>
+          <a:bodyPr/>
+          <a:lstStyle/>
+          <a:p>
+            <a:fld id="{F7021451-1387-4CA6-816F-3879F97B5CBC}" type="slidenum">
+              <a:rPr lang="en-US"/>
+              <a:t>15</a:t>
             </a:fld>
             <a:endParaRPr lang="en-US"/>
           </a:p>
@@ -1965,102 +2321,6 @@
         </p:nvSpPr>
         <p:spPr>
           <a:xfrm>
-            <a:off x="406301" y="1223963"/>
-            <a:ext cx="8498026" cy="274290"/>
-          </a:xfrm>
-          <a:prstGeom prst="rect">
-            <a:avLst/>
-          </a:prstGeom>
-          <a:noFill/>
-          <a:ln/>
-        </p:spPr>
-        <p:txBody>
-          <a:bodyPr wrap="square" lIns="0" tIns="0" rIns="0" bIns="0" rtlCol="0" anchor="t"/>
-          <a:lstStyle/>
-          <a:p>
-            <a:pPr algn="l" indent="0" marL="0">
-              <a:lnSpc>
-                <a:spcPts val="2160"/>
-              </a:lnSpc>
-              <a:spcBef>
-                <a:spcPts val="600"/>
-              </a:spcBef>
-              <a:spcAft>
-                <a:spcPts val="800"/>
-              </a:spcAft>
-              <a:buNone/>
-            </a:pPr>
-            <a:r>
-              <a:rPr lang="en-US" sz="1800" b="1" dirty="0">
-                <a:solidFill>
-                  <a:srgbClr val="997929"/>
-                </a:solidFill>
-                <a:latin typeface="Times New Roman" pitchFamily="34" charset="0"/>
-                <a:ea typeface="Times New Roman" pitchFamily="34" charset="-122"/>
-                <a:cs typeface="Times New Roman" pitchFamily="34" charset="-120"/>
-              </a:rPr>
-              <a:t>Learning objective</a:t>
-            </a:r>
-            <a:endParaRPr lang="en-US" sz="1800" dirty="0"/>
-          </a:p>
-        </p:txBody>
-      </p:sp>
-      <p:sp>
-        <p:nvSpPr>
-          <p:cNvPr id="6" name="Text 4"/>
-          <p:cNvSpPr/>
-          <p:nvPr/>
-        </p:nvSpPr>
-        <p:spPr>
-          <a:xfrm>
-            <a:off x="406301" y="1637854"/>
-            <a:ext cx="8498026" cy="213271"/>
-          </a:xfrm>
-          <a:prstGeom prst="rect">
-            <a:avLst/>
-          </a:prstGeom>
-          <a:noFill/>
-          <a:ln/>
-        </p:spPr>
-        <p:txBody>
-          <a:bodyPr wrap="square" lIns="0" tIns="0" rIns="0" bIns="0" rtlCol="0" anchor="t"/>
-          <a:lstStyle/>
-          <a:p>
-            <a:pPr algn="l" indent="0" marL="0">
-              <a:lnSpc>
-                <a:spcPts val="1680"/>
-              </a:lnSpc>
-              <a:spcBef>
-                <a:spcPts val="300"/>
-              </a:spcBef>
-              <a:spcAft>
-                <a:spcPts val="300"/>
-              </a:spcAft>
-              <a:buNone/>
-            </a:pPr>
-            <a:r>
-              <a:rPr lang="en-US" sz="1200" dirty="0">
-                <a:solidFill>
-                  <a:srgbClr val="1A1A1A"/>
-                </a:solidFill>
-                <a:latin typeface="Georgia" pitchFamily="34" charset="0"/>
-                <a:ea typeface="Georgia" pitchFamily="34" charset="-122"/>
-                <a:cs typeface="Georgia" pitchFamily="34" charset="-120"/>
-              </a:rPr>
-              <a:t>Students read YS 2.49–50 in IAST + translation, practise counted breath safely, and complete the formative quiz.</a:t>
-            </a:r>
-            <a:endParaRPr lang="en-US" sz="1200" dirty="0"/>
-          </a:p>
-        </p:txBody>
-      </p:sp>
-      <p:sp>
-        <p:nvSpPr>
-          <p:cNvPr id="7" name="Text 5"/>
-          <p:cNvSpPr/>
-          <p:nvPr/>
-        </p:nvSpPr>
-        <p:spPr>
-          <a:xfrm>
             <a:off x="406301" y="4434929"/>
             <a:ext cx="8498026" cy="213271"/>
           </a:xfrm>
@@ -2205,7 +2465,7 @@
                 <a:ea typeface="Times New Roman" pitchFamily="34" charset="-122"/>
                 <a:cs typeface="Times New Roman" pitchFamily="34" charset="-120"/>
               </a:rPr>
-              <a:t>Teacher notes</a:t>
+              <a:t>Practice (12 min) — Safe counted breath</a:t>
             </a:r>
             <a:endParaRPr lang="en-US" sz="1800" dirty="0"/>
           </a:p>
@@ -2219,8 +2479,8 @@
         </p:nvSpPr>
         <p:spPr>
           <a:xfrm>
-            <a:off x="406301" y="870942"/>
-            <a:ext cx="8498026" cy="639812"/>
+            <a:off x="634901" y="883593"/>
+            <a:ext cx="8102798" cy="769441"/>
           </a:xfrm>
           <a:prstGeom prst="rect">
             <a:avLst/>
@@ -2232,17 +2492,15 @@
           <a:bodyPr wrap="square" lIns="0" tIns="0" rIns="0" bIns="0" rtlCol="0" anchor="t"/>
           <a:lstStyle/>
           <a:p>
-            <a:pPr algn="l" indent="0" marL="0">
-              <a:lnSpc>
-                <a:spcPts val="1680"/>
-              </a:lnSpc>
-              <a:spcBef>
-                <a:spcPts val="300"/>
-              </a:spcBef>
-              <a:spcAft>
-                <a:spcPts val="300"/>
-              </a:spcAft>
-              <a:buNone/>
+            <a:pPr algn="l" marL="342900" indent="-342900">
+              <a:lnSpc>
+                <a:spcPts val="1620"/>
+              </a:lnSpc>
+              <a:spcAft>
+                <a:spcPts val="300"/>
+              </a:spcAft>
+              <a:buSzPct val="100000"/>
+              <a:buChar char="•"/>
             </a:pPr>
             <a:r>
               <a:rPr lang="en-US" sz="1200" dirty="0">
@@ -2253,15 +2511,134 @@
                 <a:ea typeface="Georgia" pitchFamily="34" charset="-122"/>
                 <a:cs typeface="Georgia" pitchFamily="34" charset="-120"/>
               </a:rPr>
-              <a:t>– The "ascending from gross to subtle" arc of YS 2.49 → 2.50 → 2.51 is one of the most concise descriptions of prāṇāyāma in any tradition. Linger here. – For safety: forceful prāṇāyāma is genuinely contraindicated for several conditions. Default position: natural breath + counted breath only.</a:t>
+              <a:t>5 min: natural-breath observation.</a:t>
             </a:r>
             <a:endParaRPr lang="en-US" sz="1200" dirty="0"/>
           </a:p>
+          <a:p>
+            <a:pPr algn="l" marL="342900" indent="-342900">
+              <a:lnSpc>
+                <a:spcPts val="1620"/>
+              </a:lnSpc>
+              <a:spcAft>
+                <a:spcPts val="300"/>
+              </a:spcAft>
+              <a:buSzPct val="100000"/>
+              <a:buChar char="•"/>
+            </a:pPr>
+            <a:r>
+              <a:rPr lang="en-US" sz="1200" dirty="0">
+                <a:solidFill>
+                  <a:srgbClr val="1A1A1A"/>
+                </a:solidFill>
+                <a:latin typeface="Georgia" pitchFamily="34" charset="0"/>
+                <a:ea typeface="Georgia" pitchFamily="34" charset="-122"/>
+                <a:cs typeface="Georgia" pitchFamily="34" charset="-120"/>
+              </a:rPr>
+              <a:t>5 min: counted breath (4 in, 4 out). No retention.</a:t>
+            </a:r>
+            <a:endParaRPr lang="en-US" sz="1200" dirty="0"/>
+          </a:p>
+          <a:p>
+            <a:pPr algn="l" marL="342900" indent="-342900">
+              <a:lnSpc>
+                <a:spcPts val="1620"/>
+              </a:lnSpc>
+              <a:spcAft>
+                <a:spcPts val="300"/>
+              </a:spcAft>
+              <a:buSzPct val="100000"/>
+              <a:buChar char="•"/>
+            </a:pPr>
+            <a:r>
+              <a:rPr lang="en-US" sz="1200" dirty="0">
+                <a:solidFill>
+                  <a:srgbClr val="1A1A1A"/>
+                </a:solidFill>
+                <a:latin typeface="Georgia" pitchFamily="34" charset="0"/>
+                <a:ea typeface="Georgia" pitchFamily="34" charset="-122"/>
+                <a:cs typeface="Georgia" pitchFamily="34" charset="-120"/>
+              </a:rPr>
+              <a:t>2 min: śavāsana.</a:t>
+            </a:r>
+            <a:endParaRPr lang="en-US" sz="1200" dirty="0"/>
+          </a:p>
         </p:txBody>
       </p:sp>
       <p:sp>
         <p:nvSpPr>
           <p:cNvPr id="5" name="Text 3"/>
+          <p:cNvSpPr/>
+          <p:nvPr/>
+        </p:nvSpPr>
+        <p:spPr>
+          <a:xfrm>
+            <a:off x="406301" y="1741884"/>
+            <a:ext cx="8498026" cy="426541"/>
+          </a:xfrm>
+          <a:prstGeom prst="rect">
+            <a:avLst/>
+          </a:prstGeom>
+          <a:noFill/>
+          <a:ln/>
+        </p:spPr>
+        <p:txBody>
+          <a:bodyPr wrap="square" lIns="0" tIns="0" rIns="0" bIns="0" rtlCol="0" anchor="t"/>
+          <a:lstStyle/>
+          <a:p>
+            <a:pPr algn="l" indent="0" marL="0">
+              <a:lnSpc>
+                <a:spcPts val="1680"/>
+              </a:lnSpc>
+              <a:spcBef>
+                <a:spcPts val="300"/>
+              </a:spcBef>
+              <a:spcAft>
+                <a:spcPts val="300"/>
+              </a:spcAft>
+              <a:buNone/>
+            </a:pPr>
+            <a:r>
+              <a:rPr lang="en-US" sz="1200" b="1" dirty="0">
+                <a:solidFill>
+                  <a:srgbClr val="1A1A1A"/>
+                </a:solidFill>
+                <a:latin typeface="Georgia" pitchFamily="34" charset="0"/>
+                <a:ea typeface="Georgia" pitchFamily="34" charset="-122"/>
+                <a:cs typeface="Georgia" pitchFamily="34" charset="-120"/>
+              </a:rPr>
+              <a:t>Senior-band caveat:</a:t>
+            </a:r>
+            <a:pPr algn="l" indent="0" marL="0">
+              <a:lnSpc>
+                <a:spcPts val="1680"/>
+              </a:lnSpc>
+              <a:spcBef>
+                <a:spcPts val="300"/>
+              </a:spcBef>
+              <a:spcAft>
+                <a:spcPts val="300"/>
+              </a:spcAft>
+              <a:buNone/>
+            </a:pPr>
+            <a:r>
+              <a:rPr lang="en-US" sz="1200" dirty="0">
+                <a:solidFill>
+                  <a:srgbClr val="1A1A1A"/>
+                </a:solidFill>
+                <a:latin typeface="Georgia" pitchFamily="34" charset="0"/>
+                <a:ea typeface="Georgia" pitchFamily="34" charset="-122"/>
+                <a:cs typeface="Georgia" pitchFamily="34" charset="-120"/>
+              </a:rPr>
+              <a:t> With explicit teacher screening for contraindications (asthma, anxiety disorders), counted breath with brief retention (4-4-4-4: in 4, hold 4, out 4, hold 4) MAY be introduced. Default: skip retention.</a:t>
+            </a:r>
+            <a:endParaRPr lang="en-US" sz="1200" dirty="0"/>
+          </a:p>
+        </p:txBody>
+      </p:sp>
+      <p:sp>
+        <p:nvSpPr>
+          <p:cNvPr id="6" name="Text 4"/>
           <p:cNvSpPr/>
           <p:nvPr/>
         </p:nvSpPr>
@@ -2411,7 +2788,7 @@
                 <a:ea typeface="Times New Roman" pitchFamily="34" charset="-122"/>
                 <a:cs typeface="Times New Roman" pitchFamily="34" charset="-120"/>
               </a:rPr>
-              <a:t>Citation(s) used</a:t>
+              <a:t>Formative quiz Part B (15 min)</a:t>
             </a:r>
             <a:endParaRPr lang="en-US" sz="1800" dirty="0"/>
           </a:p>
@@ -2425,8 +2802,8 @@
         </p:nvSpPr>
         <p:spPr>
           <a:xfrm>
-            <a:off x="406301" y="870942"/>
-            <a:ext cx="8498026" cy="222796"/>
+            <a:off x="634901" y="883593"/>
+            <a:ext cx="8102798" cy="487561"/>
           </a:xfrm>
           <a:prstGeom prst="rect">
             <a:avLst/>
@@ -2438,17 +2815,15 @@
           <a:bodyPr wrap="square" lIns="0" tIns="0" rIns="0" bIns="0" rtlCol="0" anchor="t"/>
           <a:lstStyle/>
           <a:p>
-            <a:pPr algn="l" indent="0" marL="0">
-              <a:lnSpc>
-                <a:spcPts val="1680"/>
-              </a:lnSpc>
-              <a:spcBef>
-                <a:spcPts val="300"/>
-              </a:spcBef>
-              <a:spcAft>
-                <a:spcPts val="300"/>
-              </a:spcAft>
-              <a:buNone/>
+            <a:pPr algn="l" marL="342900" indent="-342900">
+              <a:lnSpc>
+                <a:spcPts val="1620"/>
+              </a:lnSpc>
+              <a:spcAft>
+                <a:spcPts val="300"/>
+              </a:spcAft>
+              <a:buSzPct val="100000"/>
+              <a:buChar char="•"/>
             </a:pPr>
             <a:r>
               <a:rPr lang="en-US" sz="1200" dirty="0">
@@ -2459,8 +2834,33 @@
                 <a:ea typeface="Georgia" pitchFamily="34" charset="-122"/>
                 <a:cs typeface="Georgia" pitchFamily="34" charset="-120"/>
               </a:rPr>
-              <a:t>– Patañjali YS 2.49–50 — Bryant (2009), p. 288–292. – SB 4.8.44 — vidya-karana RAG cache </a:t>
-            </a:r>
+              <a:t>10 marks: limb identification, YS verse identification, safety question, short answer on YS 2.46 dual criterion, primary source reading question.</a:t>
+            </a:r>
+            <a:endParaRPr lang="en-US" sz="1200" dirty="0"/>
+          </a:p>
+        </p:txBody>
+      </p:sp>
+      <p:sp>
+        <p:nvSpPr>
+          <p:cNvPr id="5" name="Text 3"/>
+          <p:cNvSpPr/>
+          <p:nvPr/>
+        </p:nvSpPr>
+        <p:spPr>
+          <a:xfrm>
+            <a:off x="406301" y="4434929"/>
+            <a:ext cx="8498026" cy="213271"/>
+          </a:xfrm>
+          <a:prstGeom prst="rect">
+            <a:avLst/>
+          </a:prstGeom>
+          <a:noFill/>
+          <a:ln/>
+        </p:spPr>
+        <p:txBody>
+          <a:bodyPr wrap="square" lIns="0" tIns="0" rIns="0" bIns="0" rtlCol="0" anchor="t"/>
+          <a:lstStyle/>
+          <a:p>
             <a:pPr algn="l" indent="0" marL="0">
               <a:lnSpc>
                 <a:spcPts val="1680"/>
@@ -2482,15 +2882,932 @@
                 <a:ea typeface="Georgia" pitchFamily="34" charset="-122"/>
                 <a:cs typeface="Georgia" pitchFamily="34" charset="-120"/>
               </a:rPr>
+              <a:t>Senior ·  · IKS Curriculum</a:t>
+            </a:r>
+            <a:endParaRPr lang="en-US" sz="1200" dirty="0"/>
+          </a:p>
+        </p:txBody>
+      </p:sp>
+    </p:spTree>
+  </p:cSld>
+  <p:clrMapOvr>
+    <a:masterClrMapping/>
+  </p:clrMapOvr>
+</p:sld>
+</file>
+
+<file path=ppt/slides/slide12.xml><?xml version="1.0" encoding="utf-8"?>
+<p:sld xmlns:a="http://schemas.openxmlformats.org/drawingml/2006/main" xmlns:r="http://schemas.openxmlformats.org/officeDocument/2006/relationships" xmlns:p="http://schemas.openxmlformats.org/presentationml/2006/main">
+  <p:cSld name="Slide 12">
+    <p:bg>
+      <p:bgPr>
+        <a:solidFill>
+          <a:srgbClr val="FAF7F2"/>
+        </a:solidFill>
+      </p:bgPr>
+    </p:bg>
+    <p:spTree>
+      <p:nvGrpSpPr>
+        <p:cNvPr id="1" name=""/>
+        <p:cNvGrpSpPr/>
+        <p:nvPr/>
+      </p:nvGrpSpPr>
+      <p:grpSpPr>
+        <a:xfrm>
+          <a:off x="0" y="0"/>
+          <a:ext cx="0" cy="0"/>
+          <a:chOff x="0" y="0"/>
+          <a:chExt cx="0" cy="0"/>
+        </a:xfrm>
+      </p:grpSpPr>
+      <p:sp>
+        <p:nvSpPr>
+          <p:cNvPr id="2" name="Text 0"/>
+          <p:cNvSpPr/>
+          <p:nvPr/>
+        </p:nvSpPr>
+        <p:spPr>
+          <a:xfrm>
+            <a:off x="0" y="0"/>
+            <a:ext cx="9144000" cy="101501"/>
+          </a:xfrm>
+          <a:prstGeom prst="rect">
+            <a:avLst/>
+          </a:prstGeom>
+          <a:solidFill>
+            <a:srgbClr val="5D1D2E"/>
+          </a:solidFill>
+          <a:ln/>
+        </p:spPr>
+        <p:txBody>
+          <a:bodyPr wrap="square" rtlCol="0" anchor="ctr"/>
+          <a:lstStyle/>
+          <a:p>
+            <a:pPr indent="0" marL="0">
+              <a:buNone/>
+            </a:pPr>
+            <a:endParaRPr lang="en-US" dirty="0"/>
+          </a:p>
+        </p:txBody>
+      </p:sp>
+      <p:sp>
+        <p:nvSpPr>
+          <p:cNvPr id="3" name="Text 1"/>
+          <p:cNvSpPr/>
+          <p:nvPr/>
+        </p:nvSpPr>
+        <p:spPr>
+          <a:xfrm>
+            <a:off x="406301" y="457051"/>
+            <a:ext cx="8498026" cy="274290"/>
+          </a:xfrm>
+          <a:prstGeom prst="rect">
+            <a:avLst/>
+          </a:prstGeom>
+          <a:noFill/>
+          <a:ln/>
+        </p:spPr>
+        <p:txBody>
+          <a:bodyPr wrap="square" lIns="0" tIns="0" rIns="0" bIns="0" rtlCol="0" anchor="t"/>
+          <a:lstStyle/>
+          <a:p>
+            <a:pPr algn="l" indent="0" marL="0">
+              <a:lnSpc>
+                <a:spcPts val="2160"/>
+              </a:lnSpc>
+              <a:spcBef>
+                <a:spcPts val="600"/>
+              </a:spcBef>
+              <a:spcAft>
+                <a:spcPts val="800"/>
+              </a:spcAft>
+              <a:buNone/>
+            </a:pPr>
+            <a:r>
+              <a:rPr lang="en-US" sz="1800" b="1" dirty="0">
+                <a:solidFill>
+                  <a:srgbClr val="997929"/>
+                </a:solidFill>
+                <a:latin typeface="Times New Roman" pitchFamily="34" charset="0"/>
+                <a:ea typeface="Times New Roman" pitchFamily="34" charset="-122"/>
+                <a:cs typeface="Times New Roman" pitchFamily="34" charset="-120"/>
+              </a:rPr>
+              <a:t>Wrap-up (3 min)</a:t>
+            </a:r>
+            <a:endParaRPr lang="en-US" sz="1800" dirty="0"/>
+          </a:p>
+        </p:txBody>
+      </p:sp>
+      <p:sp>
+        <p:nvSpPr>
+          <p:cNvPr id="4" name="Text 2"/>
+          <p:cNvSpPr/>
+          <p:nvPr/>
+        </p:nvSpPr>
+        <p:spPr>
+          <a:xfrm>
+            <a:off x="634901" y="883593"/>
+            <a:ext cx="8102798" cy="281880"/>
+          </a:xfrm>
+          <a:prstGeom prst="rect">
+            <a:avLst/>
+          </a:prstGeom>
+          <a:noFill/>
+          <a:ln/>
+        </p:spPr>
+        <p:txBody>
+          <a:bodyPr wrap="square" lIns="0" tIns="0" rIns="0" bIns="0" rtlCol="0" anchor="t"/>
+          <a:lstStyle/>
+          <a:p>
+            <a:pPr algn="l" marL="342900" indent="-342900">
+              <a:lnSpc>
+                <a:spcPts val="1620"/>
+              </a:lnSpc>
+              <a:spcAft>
+                <a:spcPts val="300"/>
+              </a:spcAft>
+              <a:buSzPct val="100000"/>
+              <a:buChar char="•"/>
+            </a:pPr>
+            <a:r>
+              <a:rPr lang="en-US" sz="1200" dirty="0">
+                <a:solidFill>
+                  <a:srgbClr val="1A1A1A"/>
+                </a:solidFill>
+                <a:latin typeface="Georgia" pitchFamily="34" charset="0"/>
+                <a:ea typeface="Georgia" pitchFamily="34" charset="-122"/>
+                <a:cs typeface="Georgia" pitchFamily="34" charset="-120"/>
+              </a:rPr>
+              <a:t>Preview Day 6: </a:t>
+            </a:r>
+            <a:pPr algn="l" indent="0" marL="0">
+              <a:lnSpc>
+                <a:spcPts val="1620"/>
+              </a:lnSpc>
+              <a:spcAft>
+                <a:spcPts val="300"/>
+              </a:spcAft>
+              <a:buNone/>
+            </a:pPr>
+            <a:r>
+              <a:rPr lang="en-US" sz="1200" i="1" dirty="0">
+                <a:solidFill>
+                  <a:srgbClr val="1A1A1A"/>
+                </a:solidFill>
+                <a:latin typeface="Georgia" pitchFamily="34" charset="0"/>
+                <a:ea typeface="Georgia" pitchFamily="34" charset="-122"/>
+                <a:cs typeface="Georgia" pitchFamily="34" charset="-120"/>
+              </a:rPr>
+              <a:t>"Tomorrow — the modern research framing. Polyvagal theory."</a:t>
+            </a:r>
+            <a:endParaRPr lang="en-US" sz="1200" dirty="0"/>
+          </a:p>
+        </p:txBody>
+      </p:sp>
+      <p:sp>
+        <p:nvSpPr>
+          <p:cNvPr id="5" name="Text 3"/>
+          <p:cNvSpPr/>
+          <p:nvPr/>
+        </p:nvSpPr>
+        <p:spPr>
+          <a:xfrm>
+            <a:off x="406301" y="4434929"/>
+            <a:ext cx="8498026" cy="213271"/>
+          </a:xfrm>
+          <a:prstGeom prst="rect">
+            <a:avLst/>
+          </a:prstGeom>
+          <a:noFill/>
+          <a:ln/>
+        </p:spPr>
+        <p:txBody>
+          <a:bodyPr wrap="square" lIns="0" tIns="0" rIns="0" bIns="0" rtlCol="0" anchor="t"/>
+          <a:lstStyle/>
+          <a:p>
+            <a:pPr algn="l" indent="0" marL="0">
+              <a:lnSpc>
+                <a:spcPts val="1680"/>
+              </a:lnSpc>
+              <a:spcBef>
+                <a:spcPts val="300"/>
+              </a:spcBef>
+              <a:spcAft>
+                <a:spcPts val="300"/>
+              </a:spcAft>
+              <a:buNone/>
+            </a:pPr>
+            <a:r>
+              <a:rPr lang="en-US" sz="1200" dirty="0">
+                <a:solidFill>
+                  <a:srgbClr val="1A1A1A"/>
+                </a:solidFill>
+                <a:latin typeface="Georgia" pitchFamily="34" charset="0"/>
+                <a:ea typeface="Georgia" pitchFamily="34" charset="-122"/>
+                <a:cs typeface="Georgia" pitchFamily="34" charset="-120"/>
+              </a:rPr>
+              <a:t>Senior ·  · IKS Curriculum</a:t>
+            </a:r>
+            <a:endParaRPr lang="en-US" sz="1200" dirty="0"/>
+          </a:p>
+        </p:txBody>
+      </p:sp>
+    </p:spTree>
+  </p:cSld>
+  <p:clrMapOvr>
+    <a:masterClrMapping/>
+  </p:clrMapOvr>
+</p:sld>
+</file>
+
+<file path=ppt/slides/slide13.xml><?xml version="1.0" encoding="utf-8"?>
+<p:sld xmlns:a="http://schemas.openxmlformats.org/drawingml/2006/main" xmlns:r="http://schemas.openxmlformats.org/officeDocument/2006/relationships" xmlns:p="http://schemas.openxmlformats.org/presentationml/2006/main">
+  <p:cSld name="Slide 13">
+    <p:bg>
+      <p:bgPr>
+        <a:solidFill>
+          <a:srgbClr val="FAF7F2"/>
+        </a:solidFill>
+      </p:bgPr>
+    </p:bg>
+    <p:spTree>
+      <p:nvGrpSpPr>
+        <p:cNvPr id="1" name=""/>
+        <p:cNvGrpSpPr/>
+        <p:nvPr/>
+      </p:nvGrpSpPr>
+      <p:grpSpPr>
+        <a:xfrm>
+          <a:off x="0" y="0"/>
+          <a:ext cx="0" cy="0"/>
+          <a:chOff x="0" y="0"/>
+          <a:chExt cx="0" cy="0"/>
+        </a:xfrm>
+      </p:grpSpPr>
+      <p:sp>
+        <p:nvSpPr>
+          <p:cNvPr id="2" name="Text 0"/>
+          <p:cNvSpPr/>
+          <p:nvPr/>
+        </p:nvSpPr>
+        <p:spPr>
+          <a:xfrm>
+            <a:off x="0" y="0"/>
+            <a:ext cx="9144000" cy="101501"/>
+          </a:xfrm>
+          <a:prstGeom prst="rect">
+            <a:avLst/>
+          </a:prstGeom>
+          <a:solidFill>
+            <a:srgbClr val="5D1D2E"/>
+          </a:solidFill>
+          <a:ln/>
+        </p:spPr>
+        <p:txBody>
+          <a:bodyPr wrap="square" rtlCol="0" anchor="ctr"/>
+          <a:lstStyle/>
+          <a:p>
+            <a:pPr indent="0" marL="0">
+              <a:buNone/>
+            </a:pPr>
+            <a:endParaRPr lang="en-US" dirty="0"/>
+          </a:p>
+        </p:txBody>
+      </p:sp>
+      <p:sp>
+        <p:nvSpPr>
+          <p:cNvPr id="3" name="Text 1"/>
+          <p:cNvSpPr/>
+          <p:nvPr/>
+        </p:nvSpPr>
+        <p:spPr>
+          <a:xfrm>
+            <a:off x="406301" y="457051"/>
+            <a:ext cx="8498026" cy="274290"/>
+          </a:xfrm>
+          <a:prstGeom prst="rect">
+            <a:avLst/>
+          </a:prstGeom>
+          <a:noFill/>
+          <a:ln/>
+        </p:spPr>
+        <p:txBody>
+          <a:bodyPr wrap="square" lIns="0" tIns="0" rIns="0" bIns="0" rtlCol="0" anchor="t"/>
+          <a:lstStyle/>
+          <a:p>
+            <a:pPr algn="l" indent="0" marL="0">
+              <a:lnSpc>
+                <a:spcPts val="2160"/>
+              </a:lnSpc>
+              <a:spcBef>
+                <a:spcPts val="600"/>
+              </a:spcBef>
+              <a:spcAft>
+                <a:spcPts val="800"/>
+              </a:spcAft>
+              <a:buNone/>
+            </a:pPr>
+            <a:r>
+              <a:rPr lang="en-US" sz="1800" b="1" dirty="0">
+                <a:solidFill>
+                  <a:srgbClr val="997929"/>
+                </a:solidFill>
+                <a:latin typeface="Times New Roman" pitchFamily="34" charset="0"/>
+                <a:ea typeface="Times New Roman" pitchFamily="34" charset="-122"/>
+                <a:cs typeface="Times New Roman" pitchFamily="34" charset="-120"/>
+              </a:rPr>
+              <a:t>Differentiation</a:t>
+            </a:r>
+            <a:endParaRPr lang="en-US" sz="1800" dirty="0"/>
+          </a:p>
+        </p:txBody>
+      </p:sp>
+      <p:sp>
+        <p:nvSpPr>
+          <p:cNvPr id="4" name="Text 2"/>
+          <p:cNvSpPr/>
+          <p:nvPr/>
+        </p:nvSpPr>
+        <p:spPr>
+          <a:xfrm>
+            <a:off x="634901" y="883593"/>
+            <a:ext cx="8102798" cy="525661"/>
+          </a:xfrm>
+          <a:prstGeom prst="rect">
+            <a:avLst/>
+          </a:prstGeom>
+          <a:noFill/>
+          <a:ln/>
+        </p:spPr>
+        <p:txBody>
+          <a:bodyPr wrap="square" lIns="0" tIns="0" rIns="0" bIns="0" rtlCol="0" anchor="t"/>
+          <a:lstStyle/>
+          <a:p>
+            <a:pPr algn="l" marL="342900" indent="-342900">
+              <a:lnSpc>
+                <a:spcPts val="1620"/>
+              </a:lnSpc>
+              <a:spcAft>
+                <a:spcPts val="300"/>
+              </a:spcAft>
+              <a:buSzPct val="100000"/>
+              <a:buChar char="•"/>
+            </a:pPr>
+            <a:r>
+              <a:rPr lang="en-US" sz="1200" b="1" dirty="0">
+                <a:solidFill>
+                  <a:srgbClr val="1A1A1A"/>
+                </a:solidFill>
+                <a:latin typeface="Georgia" pitchFamily="34" charset="0"/>
+                <a:ea typeface="Georgia" pitchFamily="34" charset="-122"/>
+                <a:cs typeface="Georgia" pitchFamily="34" charset="-120"/>
+              </a:rPr>
+              <a:t>Tier up:</a:t>
+            </a:r>
+            <a:pPr algn="l" indent="0" marL="0">
+              <a:lnSpc>
+                <a:spcPts val="1620"/>
+              </a:lnSpc>
+              <a:spcAft>
+                <a:spcPts val="300"/>
+              </a:spcAft>
+              <a:buNone/>
+            </a:pPr>
+            <a:r>
+              <a:rPr lang="en-US" sz="1200" dirty="0">
+                <a:solidFill>
+                  <a:srgbClr val="1A1A1A"/>
+                </a:solidFill>
+                <a:latin typeface="Georgia" pitchFamily="34" charset="0"/>
+                <a:ea typeface="Georgia" pitchFamily="34" charset="-122"/>
+                <a:cs typeface="Georgia" pitchFamily="34" charset="-120"/>
+              </a:rPr>
+              <a:t> Read Bryant's commentary on YS 2.49–53. Note Vyāsa's framing of subtler prāṇāyāma practices.</a:t>
+            </a:r>
+            <a:endParaRPr lang="en-US" sz="1200" dirty="0"/>
+          </a:p>
+          <a:p>
+            <a:pPr algn="l" marL="342900" indent="-342900">
+              <a:lnSpc>
+                <a:spcPts val="1620"/>
+              </a:lnSpc>
+              <a:spcAft>
+                <a:spcPts val="300"/>
+              </a:spcAft>
+              <a:buSzPct val="100000"/>
+              <a:buChar char="•"/>
+            </a:pPr>
+            <a:r>
+              <a:rPr lang="en-US" sz="1200" b="1" dirty="0">
+                <a:solidFill>
+                  <a:srgbClr val="1A1A1A"/>
+                </a:solidFill>
+                <a:latin typeface="Georgia" pitchFamily="34" charset="0"/>
+                <a:ea typeface="Georgia" pitchFamily="34" charset="-122"/>
+                <a:cs typeface="Georgia" pitchFamily="34" charset="-120"/>
+              </a:rPr>
+              <a:t>Tier down:</a:t>
+            </a:r>
+            <a:pPr algn="l" indent="0" marL="0">
+              <a:lnSpc>
+                <a:spcPts val="1620"/>
+              </a:lnSpc>
+              <a:spcAft>
+                <a:spcPts val="300"/>
+              </a:spcAft>
+              <a:buNone/>
+            </a:pPr>
+            <a:r>
+              <a:rPr lang="en-US" sz="1200" dirty="0">
+                <a:solidFill>
+                  <a:srgbClr val="1A1A1A"/>
+                </a:solidFill>
+                <a:latin typeface="Georgia" pitchFamily="34" charset="0"/>
+                <a:ea typeface="Georgia" pitchFamily="34" charset="-122"/>
+                <a:cs typeface="Georgia" pitchFamily="34" charset="-120"/>
+              </a:rPr>
+              <a:t> Stay with the natural breath; the YS verses can be re-read at home.</a:t>
+            </a:r>
+            <a:endParaRPr lang="en-US" sz="1200" dirty="0"/>
+          </a:p>
+        </p:txBody>
+      </p:sp>
+      <p:sp>
+        <p:nvSpPr>
+          <p:cNvPr id="5" name="Text 3"/>
+          <p:cNvSpPr/>
+          <p:nvPr/>
+        </p:nvSpPr>
+        <p:spPr>
+          <a:xfrm>
+            <a:off x="406301" y="4434929"/>
+            <a:ext cx="8498026" cy="213271"/>
+          </a:xfrm>
+          <a:prstGeom prst="rect">
+            <a:avLst/>
+          </a:prstGeom>
+          <a:noFill/>
+          <a:ln/>
+        </p:spPr>
+        <p:txBody>
+          <a:bodyPr wrap="square" lIns="0" tIns="0" rIns="0" bIns="0" rtlCol="0" anchor="t"/>
+          <a:lstStyle/>
+          <a:p>
+            <a:pPr algn="l" indent="0" marL="0">
+              <a:lnSpc>
+                <a:spcPts val="1680"/>
+              </a:lnSpc>
+              <a:spcBef>
+                <a:spcPts val="300"/>
+              </a:spcBef>
+              <a:spcAft>
+                <a:spcPts val="300"/>
+              </a:spcAft>
+              <a:buNone/>
+            </a:pPr>
+            <a:r>
+              <a:rPr lang="en-US" sz="1200" dirty="0">
+                <a:solidFill>
+                  <a:srgbClr val="1A1A1A"/>
+                </a:solidFill>
+                <a:latin typeface="Georgia" pitchFamily="34" charset="0"/>
+                <a:ea typeface="Georgia" pitchFamily="34" charset="-122"/>
+                <a:cs typeface="Georgia" pitchFamily="34" charset="-120"/>
+              </a:rPr>
+              <a:t>Senior ·  · IKS Curriculum</a:t>
+            </a:r>
+            <a:endParaRPr lang="en-US" sz="1200" dirty="0"/>
+          </a:p>
+        </p:txBody>
+      </p:sp>
+    </p:spTree>
+  </p:cSld>
+  <p:clrMapOvr>
+    <a:masterClrMapping/>
+  </p:clrMapOvr>
+</p:sld>
+</file>
+
+<file path=ppt/slides/slide14.xml><?xml version="1.0" encoding="utf-8"?>
+<p:sld xmlns:a="http://schemas.openxmlformats.org/drawingml/2006/main" xmlns:r="http://schemas.openxmlformats.org/officeDocument/2006/relationships" xmlns:p="http://schemas.openxmlformats.org/presentationml/2006/main">
+  <p:cSld name="Slide 14">
+    <p:bg>
+      <p:bgPr>
+        <a:solidFill>
+          <a:srgbClr val="FAF7F2"/>
+        </a:solidFill>
+      </p:bgPr>
+    </p:bg>
+    <p:spTree>
+      <p:nvGrpSpPr>
+        <p:cNvPr id="1" name=""/>
+        <p:cNvGrpSpPr/>
+        <p:nvPr/>
+      </p:nvGrpSpPr>
+      <p:grpSpPr>
+        <a:xfrm>
+          <a:off x="0" y="0"/>
+          <a:ext cx="0" cy="0"/>
+          <a:chOff x="0" y="0"/>
+          <a:chExt cx="0" cy="0"/>
+        </a:xfrm>
+      </p:grpSpPr>
+      <p:sp>
+        <p:nvSpPr>
+          <p:cNvPr id="2" name="Text 0"/>
+          <p:cNvSpPr/>
+          <p:nvPr/>
+        </p:nvSpPr>
+        <p:spPr>
+          <a:xfrm>
+            <a:off x="0" y="0"/>
+            <a:ext cx="9144000" cy="101501"/>
+          </a:xfrm>
+          <a:prstGeom prst="rect">
+            <a:avLst/>
+          </a:prstGeom>
+          <a:solidFill>
+            <a:srgbClr val="5D1D2E"/>
+          </a:solidFill>
+          <a:ln/>
+        </p:spPr>
+        <p:txBody>
+          <a:bodyPr wrap="square" rtlCol="0" anchor="ctr"/>
+          <a:lstStyle/>
+          <a:p>
+            <a:pPr indent="0" marL="0">
+              <a:buNone/>
+            </a:pPr>
+            <a:endParaRPr lang="en-US" dirty="0"/>
+          </a:p>
+        </p:txBody>
+      </p:sp>
+      <p:sp>
+        <p:nvSpPr>
+          <p:cNvPr id="3" name="Text 1"/>
+          <p:cNvSpPr/>
+          <p:nvPr/>
+        </p:nvSpPr>
+        <p:spPr>
+          <a:xfrm>
+            <a:off x="406301" y="457051"/>
+            <a:ext cx="8498026" cy="274290"/>
+          </a:xfrm>
+          <a:prstGeom prst="rect">
+            <a:avLst/>
+          </a:prstGeom>
+          <a:noFill/>
+          <a:ln/>
+        </p:spPr>
+        <p:txBody>
+          <a:bodyPr wrap="square" lIns="0" tIns="0" rIns="0" bIns="0" rtlCol="0" anchor="t"/>
+          <a:lstStyle/>
+          <a:p>
+            <a:pPr algn="l" indent="0" marL="0">
+              <a:lnSpc>
+                <a:spcPts val="2160"/>
+              </a:lnSpc>
+              <a:spcBef>
+                <a:spcPts val="600"/>
+              </a:spcBef>
+              <a:spcAft>
+                <a:spcPts val="800"/>
+              </a:spcAft>
+              <a:buNone/>
+            </a:pPr>
+            <a:r>
+              <a:rPr lang="en-US" sz="1800" b="1" dirty="0">
+                <a:solidFill>
+                  <a:srgbClr val="997929"/>
+                </a:solidFill>
+                <a:latin typeface="Times New Roman" pitchFamily="34" charset="0"/>
+                <a:ea typeface="Times New Roman" pitchFamily="34" charset="-122"/>
+                <a:cs typeface="Times New Roman" pitchFamily="34" charset="-120"/>
+              </a:rPr>
+              <a:t>Teacher notes</a:t>
+            </a:r>
+            <a:endParaRPr lang="en-US" sz="1800" dirty="0"/>
+          </a:p>
+        </p:txBody>
+      </p:sp>
+      <p:sp>
+        <p:nvSpPr>
+          <p:cNvPr id="4" name="Text 2"/>
+          <p:cNvSpPr/>
+          <p:nvPr/>
+        </p:nvSpPr>
+        <p:spPr>
+          <a:xfrm>
+            <a:off x="634901" y="883593"/>
+            <a:ext cx="8102798" cy="937022"/>
+          </a:xfrm>
+          <a:prstGeom prst="rect">
+            <a:avLst/>
+          </a:prstGeom>
+          <a:noFill/>
+          <a:ln/>
+        </p:spPr>
+        <p:txBody>
+          <a:bodyPr wrap="square" lIns="0" tIns="0" rIns="0" bIns="0" rtlCol="0" anchor="t"/>
+          <a:lstStyle/>
+          <a:p>
+            <a:pPr algn="l" marL="342900" indent="-342900">
+              <a:lnSpc>
+                <a:spcPts val="1620"/>
+              </a:lnSpc>
+              <a:spcAft>
+                <a:spcPts val="300"/>
+              </a:spcAft>
+              <a:buSzPct val="100000"/>
+              <a:buChar char="•"/>
+            </a:pPr>
+            <a:r>
+              <a:rPr lang="en-US" sz="1200" dirty="0">
+                <a:solidFill>
+                  <a:srgbClr val="1A1A1A"/>
+                </a:solidFill>
+                <a:latin typeface="Georgia" pitchFamily="34" charset="0"/>
+                <a:ea typeface="Georgia" pitchFamily="34" charset="-122"/>
+                <a:cs typeface="Georgia" pitchFamily="34" charset="-120"/>
+              </a:rPr>
+              <a:t>The "ascending from gross to subtle" arc of YS 2.49 → 2.50 → 2.51 is one of the most concise descriptions of prāṇāyāma in any tradition. Linger here.</a:t>
+            </a:r>
+            <a:endParaRPr lang="en-US" sz="1200" dirty="0"/>
+          </a:p>
+          <a:p>
+            <a:pPr algn="l" marL="342900" indent="-342900">
+              <a:lnSpc>
+                <a:spcPts val="1620"/>
+              </a:lnSpc>
+              <a:spcAft>
+                <a:spcPts val="300"/>
+              </a:spcAft>
+              <a:buSzPct val="100000"/>
+              <a:buChar char="•"/>
+            </a:pPr>
+            <a:r>
+              <a:rPr lang="en-US" sz="1200" dirty="0">
+                <a:solidFill>
+                  <a:srgbClr val="1A1A1A"/>
+                </a:solidFill>
+                <a:latin typeface="Georgia" pitchFamily="34" charset="0"/>
+                <a:ea typeface="Georgia" pitchFamily="34" charset="-122"/>
+                <a:cs typeface="Georgia" pitchFamily="34" charset="-120"/>
+              </a:rPr>
+              <a:t>For safety: forceful prāṇāyāma is genuinely contraindicated for several conditions. Default position: natural breath + counted breath only.</a:t>
+            </a:r>
+            <a:endParaRPr lang="en-US" sz="1200" dirty="0"/>
+          </a:p>
+        </p:txBody>
+      </p:sp>
+      <p:sp>
+        <p:nvSpPr>
+          <p:cNvPr id="5" name="Text 3"/>
+          <p:cNvSpPr/>
+          <p:nvPr/>
+        </p:nvSpPr>
+        <p:spPr>
+          <a:xfrm>
+            <a:off x="406301" y="4434929"/>
+            <a:ext cx="8498026" cy="213271"/>
+          </a:xfrm>
+          <a:prstGeom prst="rect">
+            <a:avLst/>
+          </a:prstGeom>
+          <a:noFill/>
+          <a:ln/>
+        </p:spPr>
+        <p:txBody>
+          <a:bodyPr wrap="square" lIns="0" tIns="0" rIns="0" bIns="0" rtlCol="0" anchor="t"/>
+          <a:lstStyle/>
+          <a:p>
+            <a:pPr algn="l" indent="0" marL="0">
+              <a:lnSpc>
+                <a:spcPts val="1680"/>
+              </a:lnSpc>
+              <a:spcBef>
+                <a:spcPts val="300"/>
+              </a:spcBef>
+              <a:spcAft>
+                <a:spcPts val="300"/>
+              </a:spcAft>
+              <a:buNone/>
+            </a:pPr>
+            <a:r>
+              <a:rPr lang="en-US" sz="1200" dirty="0">
+                <a:solidFill>
+                  <a:srgbClr val="1A1A1A"/>
+                </a:solidFill>
+                <a:latin typeface="Georgia" pitchFamily="34" charset="0"/>
+                <a:ea typeface="Georgia" pitchFamily="34" charset="-122"/>
+                <a:cs typeface="Georgia" pitchFamily="34" charset="-120"/>
+              </a:rPr>
+              <a:t>Senior ·  · IKS Curriculum</a:t>
+            </a:r>
+            <a:endParaRPr lang="en-US" sz="1200" dirty="0"/>
+          </a:p>
+        </p:txBody>
+      </p:sp>
+    </p:spTree>
+  </p:cSld>
+  <p:clrMapOvr>
+    <a:masterClrMapping/>
+  </p:clrMapOvr>
+</p:sld>
+</file>
+
+<file path=ppt/slides/slide15.xml><?xml version="1.0" encoding="utf-8"?>
+<p:sld xmlns:a="http://schemas.openxmlformats.org/drawingml/2006/main" xmlns:r="http://schemas.openxmlformats.org/officeDocument/2006/relationships" xmlns:p="http://schemas.openxmlformats.org/presentationml/2006/main">
+  <p:cSld name="Slide 15">
+    <p:bg>
+      <p:bgPr>
+        <a:solidFill>
+          <a:srgbClr val="FAF7F2"/>
+        </a:solidFill>
+      </p:bgPr>
+    </p:bg>
+    <p:spTree>
+      <p:nvGrpSpPr>
+        <p:cNvPr id="1" name=""/>
+        <p:cNvGrpSpPr/>
+        <p:nvPr/>
+      </p:nvGrpSpPr>
+      <p:grpSpPr>
+        <a:xfrm>
+          <a:off x="0" y="0"/>
+          <a:ext cx="0" cy="0"/>
+          <a:chOff x="0" y="0"/>
+          <a:chExt cx="0" cy="0"/>
+        </a:xfrm>
+      </p:grpSpPr>
+      <p:sp>
+        <p:nvSpPr>
+          <p:cNvPr id="2" name="Text 0"/>
+          <p:cNvSpPr/>
+          <p:nvPr/>
+        </p:nvSpPr>
+        <p:spPr>
+          <a:xfrm>
+            <a:off x="0" y="0"/>
+            <a:ext cx="9144000" cy="101501"/>
+          </a:xfrm>
+          <a:prstGeom prst="rect">
+            <a:avLst/>
+          </a:prstGeom>
+          <a:solidFill>
+            <a:srgbClr val="5D1D2E"/>
+          </a:solidFill>
+          <a:ln/>
+        </p:spPr>
+        <p:txBody>
+          <a:bodyPr wrap="square" rtlCol="0" anchor="ctr"/>
+          <a:lstStyle/>
+          <a:p>
+            <a:pPr indent="0" marL="0">
+              <a:buNone/>
+            </a:pPr>
+            <a:endParaRPr lang="en-US" dirty="0"/>
+          </a:p>
+        </p:txBody>
+      </p:sp>
+      <p:sp>
+        <p:nvSpPr>
+          <p:cNvPr id="3" name="Text 1"/>
+          <p:cNvSpPr/>
+          <p:nvPr/>
+        </p:nvSpPr>
+        <p:spPr>
+          <a:xfrm>
+            <a:off x="406301" y="457051"/>
+            <a:ext cx="8498026" cy="274290"/>
+          </a:xfrm>
+          <a:prstGeom prst="rect">
+            <a:avLst/>
+          </a:prstGeom>
+          <a:noFill/>
+          <a:ln/>
+        </p:spPr>
+        <p:txBody>
+          <a:bodyPr wrap="square" lIns="0" tIns="0" rIns="0" bIns="0" rtlCol="0" anchor="t"/>
+          <a:lstStyle/>
+          <a:p>
+            <a:pPr algn="l" indent="0" marL="0">
+              <a:lnSpc>
+                <a:spcPts val="2160"/>
+              </a:lnSpc>
+              <a:spcBef>
+                <a:spcPts val="600"/>
+              </a:spcBef>
+              <a:spcAft>
+                <a:spcPts val="800"/>
+              </a:spcAft>
+              <a:buNone/>
+            </a:pPr>
+            <a:r>
+              <a:rPr lang="en-US" sz="1800" b="1" dirty="0">
+                <a:solidFill>
+                  <a:srgbClr val="997929"/>
+                </a:solidFill>
+                <a:latin typeface="Times New Roman" pitchFamily="34" charset="0"/>
+                <a:ea typeface="Times New Roman" pitchFamily="34" charset="-122"/>
+                <a:cs typeface="Times New Roman" pitchFamily="34" charset="-120"/>
+              </a:rPr>
+              <a:t>Citation(s) used</a:t>
+            </a:r>
+            <a:endParaRPr lang="en-US" sz="1800" dirty="0"/>
+          </a:p>
+        </p:txBody>
+      </p:sp>
+      <p:sp>
+        <p:nvSpPr>
+          <p:cNvPr id="4" name="Text 2"/>
+          <p:cNvSpPr/>
+          <p:nvPr/>
+        </p:nvSpPr>
+        <p:spPr>
+          <a:xfrm>
+            <a:off x="634901" y="883593"/>
+            <a:ext cx="8102798" cy="544711"/>
+          </a:xfrm>
+          <a:prstGeom prst="rect">
+            <a:avLst/>
+          </a:prstGeom>
+          <a:noFill/>
+          <a:ln/>
+        </p:spPr>
+        <p:txBody>
+          <a:bodyPr wrap="square" lIns="0" tIns="0" rIns="0" bIns="0" rtlCol="0" anchor="t"/>
+          <a:lstStyle/>
+          <a:p>
+            <a:pPr algn="l" marL="342900" indent="-342900">
+              <a:lnSpc>
+                <a:spcPts val="1620"/>
+              </a:lnSpc>
+              <a:spcAft>
+                <a:spcPts val="300"/>
+              </a:spcAft>
+              <a:buSzPct val="100000"/>
+              <a:buChar char="•"/>
+            </a:pPr>
+            <a:r>
+              <a:rPr lang="en-US" sz="1200" dirty="0">
+                <a:solidFill>
+                  <a:srgbClr val="1A1A1A"/>
+                </a:solidFill>
+                <a:latin typeface="Georgia" pitchFamily="34" charset="0"/>
+                <a:ea typeface="Georgia" pitchFamily="34" charset="-122"/>
+                <a:cs typeface="Georgia" pitchFamily="34" charset="-120"/>
+              </a:rPr>
+              <a:t>Patañjali YS 2.49–50 — Bryant (2009), p. 288–292.</a:t>
+            </a:r>
+            <a:endParaRPr lang="en-US" sz="1200" dirty="0"/>
+          </a:p>
+          <a:p>
+            <a:pPr algn="l" marL="342900" indent="-342900">
+              <a:lnSpc>
+                <a:spcPts val="1620"/>
+              </a:lnSpc>
+              <a:spcAft>
+                <a:spcPts val="300"/>
+              </a:spcAft>
+              <a:buSzPct val="100000"/>
+              <a:buChar char="•"/>
+            </a:pPr>
+            <a:r>
+              <a:rPr lang="en-US" sz="1200" dirty="0">
+                <a:solidFill>
+                  <a:srgbClr val="1A1A1A"/>
+                </a:solidFill>
+                <a:latin typeface="Georgia" pitchFamily="34" charset="0"/>
+                <a:ea typeface="Georgia" pitchFamily="34" charset="-122"/>
+                <a:cs typeface="Georgia" pitchFamily="34" charset="-120"/>
+              </a:rPr>
+              <a:t>SB 4.8.44 — vidya-karana RAG cache </a:t>
+            </a:r>
+            <a:pPr algn="l" indent="0" marL="0">
+              <a:lnSpc>
+                <a:spcPts val="1620"/>
+              </a:lnSpc>
+              <a:spcAft>
+                <a:spcPts val="300"/>
+              </a:spcAft>
+              <a:buNone/>
+            </a:pPr>
+            <a:r>
+              <a:rPr lang="en-US" sz="1200" dirty="0">
+                <a:solidFill>
+                  <a:srgbClr val="1A1A1A"/>
+                </a:solidFill>
+                <a:latin typeface="Georgia" pitchFamily="34" charset="0"/>
+                <a:ea typeface="Georgia" pitchFamily="34" charset="-122"/>
+                <a:cs typeface="Georgia" pitchFamily="34" charset="-120"/>
+              </a:rPr>
               <a:t>day-06-pranayama.json</a:t>
             </a:r>
             <a:pPr algn="l" indent="0" marL="0">
               <a:lnSpc>
-                <a:spcPts val="1680"/>
-              </a:lnSpc>
-              <a:spcBef>
-                <a:spcPts val="300"/>
-              </a:spcBef>
+                <a:spcPts val="1620"/>
+              </a:lnSpc>
               <a:spcAft>
                 <a:spcPts val="300"/>
               </a:spcAft>
@@ -2663,7 +3980,7 @@
                 <a:ea typeface="Times New Roman" pitchFamily="34" charset="-122"/>
                 <a:cs typeface="Times New Roman" pitchFamily="34" charset="-120"/>
               </a:rPr>
-              <a:t>Materials</a:t>
+              <a:t>Learning objective</a:t>
             </a:r>
             <a:endParaRPr lang="en-US" sz="1800" dirty="0"/>
           </a:p>
@@ -2711,7 +4028,7 @@
                 <a:ea typeface="Georgia" pitchFamily="34" charset="-122"/>
                 <a:cs typeface="Georgia" pitchFamily="34" charset="-120"/>
               </a:rPr>
-              <a:t>– Mats – Printed YS 2.49–50 with translation + commentary – Printed SB 4.8.44 (from cache) – Formative quiz Part B</a:t>
+              <a:t>Students read YS 2.49–50 in IAST + translation, practise counted breath safely, and complete the formative quiz.</a:t>
             </a:r>
             <a:endParaRPr lang="en-US" sz="1200" dirty="0"/>
           </a:p>
@@ -2869,7 +4186,7 @@
                 <a:ea typeface="Times New Roman" pitchFamily="34" charset="-122"/>
                 <a:cs typeface="Times New Roman" pitchFamily="34" charset="-120"/>
               </a:rPr>
-              <a:t>Flow</a:t>
+              <a:t>Materials</a:t>
             </a:r>
             <a:endParaRPr lang="en-US" sz="1800" dirty="0"/>
           </a:p>
@@ -2878,6 +4195,124 @@
       <p:sp>
         <p:nvSpPr>
           <p:cNvPr id="4" name="Text 2"/>
+          <p:cNvSpPr/>
+          <p:nvPr/>
+        </p:nvSpPr>
+        <p:spPr>
+          <a:xfrm>
+            <a:off x="634901" y="883593"/>
+            <a:ext cx="8102798" cy="1013222"/>
+          </a:xfrm>
+          <a:prstGeom prst="rect">
+            <a:avLst/>
+          </a:prstGeom>
+          <a:noFill/>
+          <a:ln/>
+        </p:spPr>
+        <p:txBody>
+          <a:bodyPr wrap="square" lIns="0" tIns="0" rIns="0" bIns="0" rtlCol="0" anchor="t"/>
+          <a:lstStyle/>
+          <a:p>
+            <a:pPr algn="l" marL="342900" indent="-342900">
+              <a:lnSpc>
+                <a:spcPts val="1620"/>
+              </a:lnSpc>
+              <a:spcAft>
+                <a:spcPts val="300"/>
+              </a:spcAft>
+              <a:buSzPct val="100000"/>
+              <a:buChar char="•"/>
+            </a:pPr>
+            <a:r>
+              <a:rPr lang="en-US" sz="1200" dirty="0">
+                <a:solidFill>
+                  <a:srgbClr val="1A1A1A"/>
+                </a:solidFill>
+                <a:latin typeface="Georgia" pitchFamily="34" charset="0"/>
+                <a:ea typeface="Georgia" pitchFamily="34" charset="-122"/>
+                <a:cs typeface="Georgia" pitchFamily="34" charset="-120"/>
+              </a:rPr>
+              <a:t>Mats</a:t>
+            </a:r>
+            <a:endParaRPr lang="en-US" sz="1200" dirty="0"/>
+          </a:p>
+          <a:p>
+            <a:pPr algn="l" marL="342900" indent="-342900">
+              <a:lnSpc>
+                <a:spcPts val="1620"/>
+              </a:lnSpc>
+              <a:spcAft>
+                <a:spcPts val="300"/>
+              </a:spcAft>
+              <a:buSzPct val="100000"/>
+              <a:buChar char="•"/>
+            </a:pPr>
+            <a:r>
+              <a:rPr lang="en-US" sz="1200" dirty="0">
+                <a:solidFill>
+                  <a:srgbClr val="1A1A1A"/>
+                </a:solidFill>
+                <a:latin typeface="Georgia" pitchFamily="34" charset="0"/>
+                <a:ea typeface="Georgia" pitchFamily="34" charset="-122"/>
+                <a:cs typeface="Georgia" pitchFamily="34" charset="-120"/>
+              </a:rPr>
+              <a:t>Printed YS 2.49–50 with translation + commentary</a:t>
+            </a:r>
+            <a:endParaRPr lang="en-US" sz="1200" dirty="0"/>
+          </a:p>
+          <a:p>
+            <a:pPr algn="l" marL="342900" indent="-342900">
+              <a:lnSpc>
+                <a:spcPts val="1620"/>
+              </a:lnSpc>
+              <a:spcAft>
+                <a:spcPts val="300"/>
+              </a:spcAft>
+              <a:buSzPct val="100000"/>
+              <a:buChar char="•"/>
+            </a:pPr>
+            <a:r>
+              <a:rPr lang="en-US" sz="1200" dirty="0">
+                <a:solidFill>
+                  <a:srgbClr val="1A1A1A"/>
+                </a:solidFill>
+                <a:latin typeface="Georgia" pitchFamily="34" charset="0"/>
+                <a:ea typeface="Georgia" pitchFamily="34" charset="-122"/>
+                <a:cs typeface="Georgia" pitchFamily="34" charset="-120"/>
+              </a:rPr>
+              <a:t>Printed SB 4.8.44 (from cache)</a:t>
+            </a:r>
+            <a:endParaRPr lang="en-US" sz="1200" dirty="0"/>
+          </a:p>
+          <a:p>
+            <a:pPr algn="l" marL="342900" indent="-342900">
+              <a:lnSpc>
+                <a:spcPts val="1620"/>
+              </a:lnSpc>
+              <a:spcAft>
+                <a:spcPts val="300"/>
+              </a:spcAft>
+              <a:buSzPct val="100000"/>
+              <a:buChar char="•"/>
+            </a:pPr>
+            <a:r>
+              <a:rPr lang="en-US" sz="1200" dirty="0">
+                <a:solidFill>
+                  <a:srgbClr val="1A1A1A"/>
+                </a:solidFill>
+                <a:latin typeface="Georgia" pitchFamily="34" charset="0"/>
+                <a:ea typeface="Georgia" pitchFamily="34" charset="-122"/>
+                <a:cs typeface="Georgia" pitchFamily="34" charset="-120"/>
+              </a:rPr>
+              <a:t>Formative quiz Part B</a:t>
+            </a:r>
+            <a:endParaRPr lang="en-US" sz="1200" dirty="0"/>
+          </a:p>
+        </p:txBody>
+      </p:sp>
+      <p:sp>
+        <p:nvSpPr>
+          <p:cNvPr id="5" name="Text 3"/>
           <p:cNvSpPr/>
           <p:nvPr/>
         </p:nvSpPr>
@@ -3027,7 +4462,7 @@
                 <a:ea typeface="Times New Roman" pitchFamily="34" charset="-122"/>
                 <a:cs typeface="Times New Roman" pitchFamily="34" charset="-120"/>
               </a:rPr>
-              <a:t>Settle (3 min)</a:t>
+              <a:t>Flow</a:t>
             </a:r>
             <a:endParaRPr lang="en-US" sz="1800" dirty="0"/>
           </a:p>
@@ -3185,7 +4620,7 @@
                 <a:ea typeface="Times New Roman" pitchFamily="34" charset="-122"/>
                 <a:cs typeface="Times New Roman" pitchFamily="34" charset="-120"/>
               </a:rPr>
-              <a:t>Primary source reading (12 min)</a:t>
+              <a:t>Settle (3 min)</a:t>
             </a:r>
             <a:endParaRPr lang="en-US" sz="1800" dirty="0"/>
           </a:p>
@@ -3199,569 +4634,7 @@
         </p:nvSpPr>
         <p:spPr>
           <a:xfrm>
-            <a:off x="634901" y="883593"/>
-            <a:ext cx="8102798" cy="281880"/>
-          </a:xfrm>
-          <a:prstGeom prst="rect">
-            <a:avLst/>
-          </a:prstGeom>
-          <a:noFill/>
-          <a:ln/>
-        </p:spPr>
-        <p:txBody>
-          <a:bodyPr wrap="square" lIns="0" tIns="0" rIns="0" bIns="0" rtlCol="0" anchor="t"/>
-          <a:lstStyle/>
-          <a:p>
-            <a:pPr algn="l" marL="342900" indent="-342900">
-              <a:lnSpc>
-                <a:spcPts val="1620"/>
-              </a:lnSpc>
-              <a:spcAft>
-                <a:spcPts val="300"/>
-              </a:spcAft>
-              <a:buSzPct val="100000"/>
-              <a:buChar char="•"/>
-            </a:pPr>
-            <a:r>
-              <a:rPr lang="en-US" sz="1200" b="1" dirty="0">
-                <a:solidFill>
-                  <a:srgbClr val="1A1A1A"/>
-                </a:solidFill>
-                <a:latin typeface="Georgia" pitchFamily="34" charset="0"/>
-                <a:ea typeface="Georgia" pitchFamily="34" charset="-122"/>
-                <a:cs typeface="Georgia" pitchFamily="34" charset="-120"/>
-              </a:rPr>
-              <a:t>YS 2.49:</a:t>
-            </a:r>
-            <a:endParaRPr lang="en-US" sz="1200" dirty="0"/>
-          </a:p>
-        </p:txBody>
-      </p:sp>
-      <p:sp>
-        <p:nvSpPr>
-          <p:cNvPr id="5" name="Text 3"/>
-          <p:cNvSpPr/>
-          <p:nvPr/>
-        </p:nvSpPr>
-        <p:spPr>
-          <a:xfrm>
-            <a:off x="406301" y="1254323"/>
-            <a:ext cx="8498026" cy="426541"/>
-          </a:xfrm>
-          <a:prstGeom prst="rect">
-            <a:avLst/>
-          </a:prstGeom>
-          <a:noFill/>
-          <a:ln/>
-        </p:spPr>
-        <p:txBody>
-          <a:bodyPr wrap="square" lIns="0" tIns="0" rIns="0" bIns="0" rtlCol="0" anchor="t"/>
-          <a:lstStyle/>
-          <a:p>
-            <a:pPr algn="l" indent="0" marL="0">
-              <a:lnSpc>
-                <a:spcPts val="1680"/>
-              </a:lnSpc>
-              <a:spcBef>
-                <a:spcPts val="300"/>
-              </a:spcBef>
-              <a:spcAft>
-                <a:spcPts val="300"/>
-              </a:spcAft>
-              <a:buNone/>
-            </a:pPr>
-            <a:r>
-              <a:rPr lang="en-US" sz="1200" dirty="0">
-                <a:solidFill>
-                  <a:srgbClr val="1A1A1A"/>
-                </a:solidFill>
-                <a:latin typeface="Georgia" pitchFamily="34" charset="0"/>
-                <a:ea typeface="Georgia" pitchFamily="34" charset="-122"/>
-                <a:cs typeface="Georgia" pitchFamily="34" charset="-120"/>
-              </a:rPr>
-              <a:t>&gt; </a:t>
-            </a:r>
-            <a:pPr algn="l" indent="0" marL="0">
-              <a:lnSpc>
-                <a:spcPts val="1680"/>
-              </a:lnSpc>
-              <a:spcBef>
-                <a:spcPts val="300"/>
-              </a:spcBef>
-              <a:spcAft>
-                <a:spcPts val="300"/>
-              </a:spcAft>
-              <a:buNone/>
-            </a:pPr>
-            <a:r>
-              <a:rPr lang="en-US" sz="1200" i="1" dirty="0">
-                <a:solidFill>
-                  <a:srgbClr val="1A1A1A"/>
-                </a:solidFill>
-                <a:latin typeface="Georgia" pitchFamily="34" charset="0"/>
-                <a:ea typeface="Georgia" pitchFamily="34" charset="-122"/>
-                <a:cs typeface="Georgia" pitchFamily="34" charset="-120"/>
-              </a:rPr>
-              <a:t>tasmin sati śvāsa-praśvāsayor gati-vicchedaḥ prāṇāyāmaḥ</a:t>
-            </a:r>
-            <a:pPr algn="l" indent="0" marL="0">
-              <a:lnSpc>
-                <a:spcPts val="1680"/>
-              </a:lnSpc>
-              <a:spcBef>
-                <a:spcPts val="300"/>
-              </a:spcBef>
-              <a:spcAft>
-                <a:spcPts val="300"/>
-              </a:spcAft>
-              <a:buNone/>
-            </a:pPr>
-            <a:r>
-              <a:rPr lang="en-US" sz="1200" dirty="0">
-                <a:solidFill>
-                  <a:srgbClr val="1A1A1A"/>
-                </a:solidFill>
-                <a:latin typeface="Georgia" pitchFamily="34" charset="0"/>
-                <a:ea typeface="Georgia" pitchFamily="34" charset="-122"/>
-                <a:cs typeface="Georgia" pitchFamily="34" charset="-120"/>
-              </a:rPr>
-              <a:t> &gt; "When that [āsana] is established, prāṇāyāma is the regulation [literally: severing of the flow] of inhalation and exhalation."</a:t>
-            </a:r>
-            <a:endParaRPr lang="en-US" sz="1200" dirty="0"/>
-          </a:p>
-        </p:txBody>
-      </p:sp>
-      <p:sp>
-        <p:nvSpPr>
-          <p:cNvPr id="6" name="Text 4"/>
-          <p:cNvSpPr/>
-          <p:nvPr/>
-        </p:nvSpPr>
-        <p:spPr>
-          <a:xfrm>
-            <a:off x="406301" y="1757065"/>
-            <a:ext cx="8498026" cy="213271"/>
-          </a:xfrm>
-          <a:prstGeom prst="rect">
-            <a:avLst/>
-          </a:prstGeom>
-          <a:noFill/>
-          <a:ln/>
-        </p:spPr>
-        <p:txBody>
-          <a:bodyPr wrap="square" lIns="0" tIns="0" rIns="0" bIns="0" rtlCol="0" anchor="t"/>
-          <a:lstStyle/>
-          <a:p>
-            <a:pPr algn="l" indent="0" marL="0">
-              <a:lnSpc>
-                <a:spcPts val="1680"/>
-              </a:lnSpc>
-              <a:spcBef>
-                <a:spcPts val="300"/>
-              </a:spcBef>
-              <a:spcAft>
-                <a:spcPts val="300"/>
-              </a:spcAft>
-              <a:buNone/>
-            </a:pPr>
-            <a:r>
-              <a:rPr lang="en-US" sz="1200" dirty="0">
-                <a:solidFill>
-                  <a:srgbClr val="1A1A1A"/>
-                </a:solidFill>
-                <a:latin typeface="Georgia" pitchFamily="34" charset="0"/>
-                <a:ea typeface="Georgia" pitchFamily="34" charset="-122"/>
-                <a:cs typeface="Georgia" pitchFamily="34" charset="-120"/>
-              </a:rPr>
-              <a:t>– Note: prāṇāyāma presupposes āsana. You don't do prāṇāyāma in chaotic posture.</a:t>
-            </a:r>
-            <a:endParaRPr lang="en-US" sz="1200" dirty="0"/>
-          </a:p>
-        </p:txBody>
-      </p:sp>
-      <p:sp>
-        <p:nvSpPr>
-          <p:cNvPr id="7" name="Text 5"/>
-          <p:cNvSpPr/>
-          <p:nvPr/>
-        </p:nvSpPr>
-        <p:spPr>
-          <a:xfrm>
-            <a:off x="634901" y="2059186"/>
-            <a:ext cx="8102798" cy="281880"/>
-          </a:xfrm>
-          <a:prstGeom prst="rect">
-            <a:avLst/>
-          </a:prstGeom>
-          <a:noFill/>
-          <a:ln/>
-        </p:spPr>
-        <p:txBody>
-          <a:bodyPr wrap="square" lIns="0" tIns="0" rIns="0" bIns="0" rtlCol="0" anchor="t"/>
-          <a:lstStyle/>
-          <a:p>
-            <a:pPr algn="l" marL="342900" indent="-342900">
-              <a:lnSpc>
-                <a:spcPts val="1620"/>
-              </a:lnSpc>
-              <a:spcAft>
-                <a:spcPts val="300"/>
-              </a:spcAft>
-              <a:buSzPct val="100000"/>
-              <a:buChar char="•"/>
-            </a:pPr>
-            <a:r>
-              <a:rPr lang="en-US" sz="1200" b="1" dirty="0">
-                <a:solidFill>
-                  <a:srgbClr val="1A1A1A"/>
-                </a:solidFill>
-                <a:latin typeface="Georgia" pitchFamily="34" charset="0"/>
-                <a:ea typeface="Georgia" pitchFamily="34" charset="-122"/>
-                <a:cs typeface="Georgia" pitchFamily="34" charset="-120"/>
-              </a:rPr>
-              <a:t>YS 2.50:</a:t>
-            </a:r>
-            <a:endParaRPr lang="en-US" sz="1200" dirty="0"/>
-          </a:p>
-        </p:txBody>
-      </p:sp>
-      <p:sp>
-        <p:nvSpPr>
-          <p:cNvPr id="8" name="Text 6"/>
-          <p:cNvSpPr/>
-          <p:nvPr/>
-        </p:nvSpPr>
-        <p:spPr>
-          <a:xfrm>
-            <a:off x="406301" y="2429917"/>
-            <a:ext cx="8498026" cy="639812"/>
-          </a:xfrm>
-          <a:prstGeom prst="rect">
-            <a:avLst/>
-          </a:prstGeom>
-          <a:noFill/>
-          <a:ln/>
-        </p:spPr>
-        <p:txBody>
-          <a:bodyPr wrap="square" lIns="0" tIns="0" rIns="0" bIns="0" rtlCol="0" anchor="t"/>
-          <a:lstStyle/>
-          <a:p>
-            <a:pPr algn="l" indent="0" marL="0">
-              <a:lnSpc>
-                <a:spcPts val="1680"/>
-              </a:lnSpc>
-              <a:spcBef>
-                <a:spcPts val="300"/>
-              </a:spcBef>
-              <a:spcAft>
-                <a:spcPts val="300"/>
-              </a:spcAft>
-              <a:buNone/>
-            </a:pPr>
-            <a:r>
-              <a:rPr lang="en-US" sz="1200" dirty="0">
-                <a:solidFill>
-                  <a:srgbClr val="1A1A1A"/>
-                </a:solidFill>
-                <a:latin typeface="Georgia" pitchFamily="34" charset="0"/>
-                <a:ea typeface="Georgia" pitchFamily="34" charset="-122"/>
-                <a:cs typeface="Georgia" pitchFamily="34" charset="-120"/>
-              </a:rPr>
-              <a:t>&gt; </a:t>
-            </a:r>
-            <a:pPr algn="l" indent="0" marL="0">
-              <a:lnSpc>
-                <a:spcPts val="1680"/>
-              </a:lnSpc>
-              <a:spcBef>
-                <a:spcPts val="300"/>
-              </a:spcBef>
-              <a:spcAft>
-                <a:spcPts val="300"/>
-              </a:spcAft>
-              <a:buNone/>
-            </a:pPr>
-            <a:r>
-              <a:rPr lang="en-US" sz="1200" i="1" dirty="0">
-                <a:solidFill>
-                  <a:srgbClr val="1A1A1A"/>
-                </a:solidFill>
-                <a:latin typeface="Georgia" pitchFamily="34" charset="0"/>
-                <a:ea typeface="Georgia" pitchFamily="34" charset="-122"/>
-                <a:cs typeface="Georgia" pitchFamily="34" charset="-120"/>
-              </a:rPr>
-              <a:t>bāhya-ābhyantara-stambha-vṛttir deśa-kāla-saṅkhyābhiḥ paridṛṣṭo dīrgha-sūkṣmaḥ</a:t>
-            </a:r>
-            <a:pPr algn="l" indent="0" marL="0">
-              <a:lnSpc>
-                <a:spcPts val="1680"/>
-              </a:lnSpc>
-              <a:spcBef>
-                <a:spcPts val="300"/>
-              </a:spcBef>
-              <a:spcAft>
-                <a:spcPts val="300"/>
-              </a:spcAft>
-              <a:buNone/>
-            </a:pPr>
-            <a:r>
-              <a:rPr lang="en-US" sz="1200" dirty="0">
-                <a:solidFill>
-                  <a:srgbClr val="1A1A1A"/>
-                </a:solidFill>
-                <a:latin typeface="Georgia" pitchFamily="34" charset="0"/>
-                <a:ea typeface="Georgia" pitchFamily="34" charset="-122"/>
-                <a:cs typeface="Georgia" pitchFamily="34" charset="-120"/>
-              </a:rPr>
-              <a:t> &gt; "Prāṇāyāma has three modifications: outer (exhale), inner (inhale), and held (retained). It is observed by place, time, and number, and becomes long and subtle."</a:t>
-            </a:r>
-            <a:endParaRPr lang="en-US" sz="1200" dirty="0"/>
-          </a:p>
-        </p:txBody>
-      </p:sp>
-      <p:sp>
-        <p:nvSpPr>
-          <p:cNvPr id="9" name="Text 7"/>
-          <p:cNvSpPr/>
-          <p:nvPr/>
-        </p:nvSpPr>
-        <p:spPr>
-          <a:xfrm>
-            <a:off x="406301" y="3145929"/>
-            <a:ext cx="8498026" cy="426541"/>
-          </a:xfrm>
-          <a:prstGeom prst="rect">
-            <a:avLst/>
-          </a:prstGeom>
-          <a:noFill/>
-          <a:ln/>
-        </p:spPr>
-        <p:txBody>
-          <a:bodyPr wrap="square" lIns="0" tIns="0" rIns="0" bIns="0" rtlCol="0" anchor="t"/>
-          <a:lstStyle/>
-          <a:p>
-            <a:pPr algn="l" indent="0" marL="0">
-              <a:lnSpc>
-                <a:spcPts val="1680"/>
-              </a:lnSpc>
-              <a:spcBef>
-                <a:spcPts val="300"/>
-              </a:spcBef>
-              <a:spcAft>
-                <a:spcPts val="300"/>
-              </a:spcAft>
-              <a:buNone/>
-            </a:pPr>
-            <a:r>
-              <a:rPr lang="en-US" sz="1200" dirty="0">
-                <a:solidFill>
-                  <a:srgbClr val="1A1A1A"/>
-                </a:solidFill>
-                <a:latin typeface="Georgia" pitchFamily="34" charset="0"/>
-                <a:ea typeface="Georgia" pitchFamily="34" charset="-122"/>
-                <a:cs typeface="Georgia" pitchFamily="34" charset="-120"/>
-              </a:rPr>
-              <a:t>– Three components: out-breath, in-breath, retention. Three measurements: place (in body), time (duration), number (count). – The goal: </a:t>
-            </a:r>
-            <a:pPr algn="l" indent="0" marL="0">
-              <a:lnSpc>
-                <a:spcPts val="1680"/>
-              </a:lnSpc>
-              <a:spcBef>
-                <a:spcPts val="300"/>
-              </a:spcBef>
-              <a:spcAft>
-                <a:spcPts val="300"/>
-              </a:spcAft>
-              <a:buNone/>
-            </a:pPr>
-            <a:r>
-              <a:rPr lang="en-US" sz="1200" i="1" dirty="0">
-                <a:solidFill>
-                  <a:srgbClr val="1A1A1A"/>
-                </a:solidFill>
-                <a:latin typeface="Georgia" pitchFamily="34" charset="0"/>
-                <a:ea typeface="Georgia" pitchFamily="34" charset="-122"/>
-                <a:cs typeface="Georgia" pitchFamily="34" charset="-120"/>
-              </a:rPr>
-              <a:t>dīrgha-sūkṣma</a:t>
-            </a:r>
-            <a:pPr algn="l" indent="0" marL="0">
-              <a:lnSpc>
-                <a:spcPts val="1680"/>
-              </a:lnSpc>
-              <a:spcBef>
-                <a:spcPts val="300"/>
-              </a:spcBef>
-              <a:spcAft>
-                <a:spcPts val="300"/>
-              </a:spcAft>
-              <a:buNone/>
-            </a:pPr>
-            <a:r>
-              <a:rPr lang="en-US" sz="1200" dirty="0">
-                <a:solidFill>
-                  <a:srgbClr val="1A1A1A"/>
-                </a:solidFill>
-                <a:latin typeface="Georgia" pitchFamily="34" charset="0"/>
-                <a:ea typeface="Georgia" pitchFamily="34" charset="-122"/>
-                <a:cs typeface="Georgia" pitchFamily="34" charset="-120"/>
-              </a:rPr>
-              <a:t> — long and subtle.</a:t>
-            </a:r>
-            <a:endParaRPr lang="en-US" sz="1200" dirty="0"/>
-          </a:p>
-        </p:txBody>
-      </p:sp>
-      <p:sp>
-        <p:nvSpPr>
-          <p:cNvPr id="10" name="Text 8"/>
-          <p:cNvSpPr/>
-          <p:nvPr/>
-        </p:nvSpPr>
-        <p:spPr>
-          <a:xfrm>
-            <a:off x="634901" y="3661321"/>
-            <a:ext cx="8102798" cy="281880"/>
-          </a:xfrm>
-          <a:prstGeom prst="rect">
-            <a:avLst/>
-          </a:prstGeom>
-          <a:noFill/>
-          <a:ln/>
-        </p:spPr>
-        <p:txBody>
-          <a:bodyPr wrap="square" lIns="0" tIns="0" rIns="0" bIns="0" rtlCol="0" anchor="t"/>
-          <a:lstStyle/>
-          <a:p>
-            <a:pPr algn="l" marL="342900" indent="-342900">
-              <a:lnSpc>
-                <a:spcPts val="1620"/>
-              </a:lnSpc>
-              <a:spcAft>
-                <a:spcPts val="300"/>
-              </a:spcAft>
-              <a:buSzPct val="100000"/>
-              <a:buChar char="•"/>
-            </a:pPr>
-            <a:r>
-              <a:rPr lang="en-US" sz="1200" b="1" dirty="0">
-                <a:solidFill>
-                  <a:srgbClr val="1A1A1A"/>
-                </a:solidFill>
-                <a:latin typeface="Georgia" pitchFamily="34" charset="0"/>
-                <a:ea typeface="Georgia" pitchFamily="34" charset="-122"/>
-                <a:cs typeface="Georgia" pitchFamily="34" charset="-120"/>
-              </a:rPr>
-              <a:t>SB 4.8.44:</a:t>
-            </a:r>
-            <a:endParaRPr lang="en-US" sz="1200" dirty="0"/>
-          </a:p>
-        </p:txBody>
-      </p:sp>
-      <p:sp>
-        <p:nvSpPr>
-          <p:cNvPr id="11" name="Text 9"/>
-          <p:cNvSpPr/>
-          <p:nvPr/>
-        </p:nvSpPr>
-        <p:spPr>
-          <a:xfrm>
-            <a:off x="406301" y="4032052"/>
-            <a:ext cx="8498026" cy="426541"/>
-          </a:xfrm>
-          <a:prstGeom prst="rect">
-            <a:avLst/>
-          </a:prstGeom>
-          <a:noFill/>
-          <a:ln/>
-        </p:spPr>
-        <p:txBody>
-          <a:bodyPr wrap="square" lIns="0" tIns="0" rIns="0" bIns="0" rtlCol="0" anchor="t"/>
-          <a:lstStyle/>
-          <a:p>
-            <a:pPr algn="l" indent="0" marL="0">
-              <a:lnSpc>
-                <a:spcPts val="1680"/>
-              </a:lnSpc>
-              <a:spcBef>
-                <a:spcPts val="300"/>
-              </a:spcBef>
-              <a:spcAft>
-                <a:spcPts val="300"/>
-              </a:spcAft>
-              <a:buNone/>
-            </a:pPr>
-            <a:r>
-              <a:rPr lang="en-US" sz="1200" dirty="0">
-                <a:solidFill>
-                  <a:srgbClr val="1A1A1A"/>
-                </a:solidFill>
-                <a:latin typeface="Georgia" pitchFamily="34" charset="0"/>
-                <a:ea typeface="Georgia" pitchFamily="34" charset="-122"/>
-                <a:cs typeface="Georgia" pitchFamily="34" charset="-120"/>
-              </a:rPr>
-              <a:t>&gt; </a:t>
-            </a:r>
-            <a:pPr algn="l" indent="0" marL="0">
-              <a:lnSpc>
-                <a:spcPts val="1680"/>
-              </a:lnSpc>
-              <a:spcBef>
-                <a:spcPts val="300"/>
-              </a:spcBef>
-              <a:spcAft>
-                <a:spcPts val="300"/>
-              </a:spcAft>
-              <a:buNone/>
-            </a:pPr>
-            <a:r>
-              <a:rPr lang="en-US" sz="1200" i="1" dirty="0">
-                <a:solidFill>
-                  <a:srgbClr val="1A1A1A"/>
-                </a:solidFill>
-                <a:latin typeface="Georgia" pitchFamily="34" charset="0"/>
-                <a:ea typeface="Georgia" pitchFamily="34" charset="-122"/>
-                <a:cs typeface="Georgia" pitchFamily="34" charset="-120"/>
-              </a:rPr>
-              <a:t>prāṇāyāmena tṛ-vṛtā prāṇendṛya-mano-malam śanair vyudasyābhidhyāyen manasā guruṇā gurum</a:t>
-            </a:r>
-            <a:pPr algn="l" indent="0" marL="0">
-              <a:lnSpc>
-                <a:spcPts val="1680"/>
-              </a:lnSpc>
-              <a:spcBef>
-                <a:spcPts val="300"/>
-              </a:spcBef>
-              <a:spcAft>
-                <a:spcPts val="300"/>
-              </a:spcAft>
-              <a:buNone/>
-            </a:pPr>
-            <a:r>
-              <a:rPr lang="en-US" sz="1200" dirty="0">
-                <a:solidFill>
-                  <a:srgbClr val="1A1A1A"/>
-                </a:solidFill>
-                <a:latin typeface="Georgia" pitchFamily="34" charset="0"/>
-                <a:ea typeface="Georgia" pitchFamily="34" charset="-122"/>
-                <a:cs typeface="Georgia" pitchFamily="34" charset="-120"/>
-              </a:rPr>
-              <a:t> &gt; "Through the threefold prāṇāyāma practice, one gradually purifies the breath, senses, and mind, and meditates."</a:t>
-            </a:r>
-            <a:endParaRPr lang="en-US" sz="1200" dirty="0"/>
-          </a:p>
-        </p:txBody>
-      </p:sp>
-      <p:sp>
-        <p:nvSpPr>
-          <p:cNvPr id="12" name="Text 10"/>
-          <p:cNvSpPr/>
-          <p:nvPr/>
-        </p:nvSpPr>
-        <p:spPr>
-          <a:xfrm>
-            <a:off x="406301" y="4610993"/>
+            <a:off x="406301" y="4434929"/>
             <a:ext cx="8498026" cy="213271"/>
           </a:xfrm>
           <a:prstGeom prst="rect">
@@ -3905,7 +4778,7 @@
                 <a:ea typeface="Times New Roman" pitchFamily="34" charset="-122"/>
                 <a:cs typeface="Times New Roman" pitchFamily="34" charset="-120"/>
               </a:rPr>
-              <a:t>Practice (12 min) — Safe counted breath</a:t>
+              <a:t>Primary source reading (12 min)</a:t>
             </a:r>
             <a:endParaRPr lang="en-US" sz="1800" dirty="0"/>
           </a:p>
@@ -3919,8 +4792,8 @@
         </p:nvSpPr>
         <p:spPr>
           <a:xfrm>
-            <a:off x="406301" y="870942"/>
-            <a:ext cx="8498026" cy="213271"/>
+            <a:off x="634901" y="883593"/>
+            <a:ext cx="8102798" cy="281880"/>
           </a:xfrm>
           <a:prstGeom prst="rect">
             <a:avLst/>
@@ -3932,20 +4805,18 @@
           <a:bodyPr wrap="square" lIns="0" tIns="0" rIns="0" bIns="0" rtlCol="0" anchor="t"/>
           <a:lstStyle/>
           <a:p>
-            <a:pPr algn="l" indent="0" marL="0">
-              <a:lnSpc>
-                <a:spcPts val="1680"/>
-              </a:lnSpc>
-              <a:spcBef>
-                <a:spcPts val="300"/>
-              </a:spcBef>
-              <a:spcAft>
-                <a:spcPts val="300"/>
-              </a:spcAft>
-              <a:buNone/>
-            </a:pPr>
-            <a:r>
-              <a:rPr lang="en-US" sz="1200" dirty="0">
+            <a:pPr algn="l" marL="342900" indent="-342900">
+              <a:lnSpc>
+                <a:spcPts val="1620"/>
+              </a:lnSpc>
+              <a:spcAft>
+                <a:spcPts val="300"/>
+              </a:spcAft>
+              <a:buSzPct val="100000"/>
+              <a:buChar char="•"/>
+            </a:pPr>
+            <a:r>
+              <a:rPr lang="en-US" sz="1200" b="1" dirty="0">
                 <a:solidFill>
                   <a:srgbClr val="1A1A1A"/>
                 </a:solidFill>
@@ -3953,7 +4824,7 @@
                 <a:ea typeface="Georgia" pitchFamily="34" charset="-122"/>
                 <a:cs typeface="Georgia" pitchFamily="34" charset="-120"/>
               </a:rPr>
-              <a:t>– 5 min: natural-breath observation. – 5 min: counted breath (4 in, 4 out). No retention. – 2 min: śavāsana.</a:t>
+              <a:t>YS 2.49:</a:t>
             </a:r>
             <a:endParaRPr lang="en-US" sz="1200" dirty="0"/>
           </a:p>
@@ -3967,13 +4838,66 @@
         </p:nvSpPr>
         <p:spPr>
           <a:xfrm>
-            <a:off x="406301" y="1160413"/>
-            <a:ext cx="8498026" cy="426541"/>
-          </a:xfrm>
-          <a:prstGeom prst="rect">
+            <a:off x="406301" y="1266974"/>
+            <a:ext cx="8331398" cy="842963"/>
+          </a:xfrm>
+          <a:prstGeom prst="rect">
+            <a:avLst/>
+          </a:prstGeom>
+          <a:solidFill>
+            <a:srgbClr val="FFFFFF"/>
+          </a:solidFill>
+          <a:ln/>
+        </p:spPr>
+        <p:txBody>
+          <a:bodyPr wrap="square" rtlCol="0" anchor="ctr"/>
+          <a:lstStyle/>
+          <a:p>
+            <a:pPr indent="0" marL="0">
+              <a:buNone/>
+            </a:pPr>
+            <a:endParaRPr lang="en-US" dirty="0"/>
+          </a:p>
+        </p:txBody>
+      </p:sp>
+      <p:sp>
+        <p:nvSpPr>
+          <p:cNvPr id="6" name="Shape 4"/>
+          <p:cNvSpPr/>
+          <p:nvPr/>
+        </p:nvSpPr>
+        <p:spPr>
+          <a:xfrm>
+            <a:off x="434876" y="1266974"/>
+            <a:ext cx="0" cy="842962"/>
+          </a:xfrm>
+          <a:prstGeom prst="line">
             <a:avLst/>
           </a:prstGeom>
           <a:noFill/>
+          <a:ln w="57150">
+            <a:solidFill>
+              <a:srgbClr val="997929"/>
+            </a:solidFill>
+            <a:prstDash val="solid"/>
+          </a:ln>
+        </p:spPr>
+      </p:sp>
+      <p:sp>
+        <p:nvSpPr>
+          <p:cNvPr id="7" name="Text 5"/>
+          <p:cNvSpPr/>
+          <p:nvPr/>
+        </p:nvSpPr>
+        <p:spPr>
+          <a:xfrm>
+            <a:off x="692051" y="1457474"/>
+            <a:ext cx="7973389" cy="461963"/>
+          </a:xfrm>
+          <a:prstGeom prst="rect">
+            <a:avLst/>
+          </a:prstGeom>
+          <a:noFill/>
           <a:ln/>
         </p:spPr>
         <p:txBody>
@@ -3982,7 +4906,7 @@
           <a:p>
             <a:pPr algn="l" indent="0" marL="0">
               <a:lnSpc>
-                <a:spcPts val="1680"/>
+                <a:spcPts val="1820"/>
               </a:lnSpc>
               <a:spcBef>
                 <a:spcPts val="300"/>
@@ -3993,7 +4917,76 @@
               <a:buNone/>
             </a:pPr>
             <a:r>
-              <a:rPr lang="en-US" sz="1200" b="1" dirty="0">
+              <a:rPr lang="en-US" sz="1300" i="1" dirty="0">
+                <a:solidFill>
+                  <a:srgbClr val="1A1A1A"/>
+                </a:solidFill>
+                <a:latin typeface="Times New Roman" pitchFamily="34" charset="0"/>
+                <a:ea typeface="Times New Roman" pitchFamily="34" charset="-122"/>
+                <a:cs typeface="Times New Roman" pitchFamily="34" charset="-120"/>
+              </a:rPr>
+              <a:t>tasmin sati śvāsa-praśvāsayor gati-vicchedaḥ prāṇāyāmaḥ</a:t>
+            </a:r>
+            <a:pPr algn="l" indent="0" marL="0">
+              <a:lnSpc>
+                <a:spcPts val="1820"/>
+              </a:lnSpc>
+              <a:spcBef>
+                <a:spcPts val="300"/>
+              </a:spcBef>
+              <a:spcAft>
+                <a:spcPts val="300"/>
+              </a:spcAft>
+              <a:buNone/>
+            </a:pPr>
+            <a:r>
+              <a:rPr lang="en-US" sz="1300" dirty="0">
+                <a:solidFill>
+                  <a:srgbClr val="1A1A1A"/>
+                </a:solidFill>
+                <a:latin typeface="Times New Roman" pitchFamily="34" charset="0"/>
+                <a:ea typeface="Times New Roman" pitchFamily="34" charset="-122"/>
+                <a:cs typeface="Times New Roman" pitchFamily="34" charset="-120"/>
+              </a:rPr>
+              <a:t> "When that [āsana] is established, prāṇāyāma is the regulation [literally: severing of the flow] of inhalation and exhalation."</a:t>
+            </a:r>
+            <a:endParaRPr lang="en-US" sz="1300" dirty="0"/>
+          </a:p>
+        </p:txBody>
+      </p:sp>
+      <p:sp>
+        <p:nvSpPr>
+          <p:cNvPr id="8" name="Text 6"/>
+          <p:cNvSpPr/>
+          <p:nvPr/>
+        </p:nvSpPr>
+        <p:spPr>
+          <a:xfrm>
+            <a:off x="634901" y="2211437"/>
+            <a:ext cx="8102798" cy="281880"/>
+          </a:xfrm>
+          <a:prstGeom prst="rect">
+            <a:avLst/>
+          </a:prstGeom>
+          <a:noFill/>
+          <a:ln/>
+        </p:spPr>
+        <p:txBody>
+          <a:bodyPr wrap="square" lIns="0" tIns="0" rIns="0" bIns="0" rtlCol="0" anchor="t"/>
+          <a:lstStyle/>
+          <a:p>
+            <a:pPr algn="l" marL="342900" indent="-342900">
+              <a:lnSpc>
+                <a:spcPts val="1620"/>
+              </a:lnSpc>
+              <a:spcAft>
+                <a:spcPts val="300"/>
+              </a:spcAft>
+              <a:buSzPct val="100000"/>
+              <a:buChar char="•"/>
+            </a:pPr>
+            <a:r>
+              <a:rPr lang="en-US" sz="1200" dirty="0">
                 <a:solidFill>
                   <a:srgbClr val="1A1A1A"/>
                 </a:solidFill>
@@ -4001,30 +4994,7 @@
                 <a:ea typeface="Georgia" pitchFamily="34" charset="-122"/>
                 <a:cs typeface="Georgia" pitchFamily="34" charset="-120"/>
               </a:rPr>
-              <a:t>Senior-band caveat:</a:t>
-            </a:r>
-            <a:pPr algn="l" indent="0" marL="0">
-              <a:lnSpc>
-                <a:spcPts val="1680"/>
-              </a:lnSpc>
-              <a:spcBef>
-                <a:spcPts val="300"/>
-              </a:spcBef>
-              <a:spcAft>
-                <a:spcPts val="300"/>
-              </a:spcAft>
-              <a:buNone/>
-            </a:pPr>
-            <a:r>
-              <a:rPr lang="en-US" sz="1200" dirty="0">
-                <a:solidFill>
-                  <a:srgbClr val="1A1A1A"/>
-                </a:solidFill>
-                <a:latin typeface="Georgia" pitchFamily="34" charset="0"/>
-                <a:ea typeface="Georgia" pitchFamily="34" charset="-122"/>
-                <a:cs typeface="Georgia" pitchFamily="34" charset="-120"/>
-              </a:rPr>
-              <a:t> With explicit teacher screening for contraindications (asthma, anxiety disorders), counted breath with brief retention (4-4-4-4: in 4, hold 4, out 4, hold 4) MAY be introduced. Default: skip retention.</a:t>
+              <a:t>Note: prāṇāyāma presupposes āsana. You don't do prāṇāyāma in chaotic posture.</a:t>
             </a:r>
             <a:endParaRPr lang="en-US" sz="1200" dirty="0"/>
           </a:p>
@@ -4032,7 +5002,7 @@
       </p:sp>
       <p:sp>
         <p:nvSpPr>
-          <p:cNvPr id="6" name="Text 4"/>
+          <p:cNvPr id="9" name="Text 7"/>
           <p:cNvSpPr/>
           <p:nvPr/>
         </p:nvSpPr>
@@ -4182,7 +5152,7 @@
                 <a:ea typeface="Times New Roman" pitchFamily="34" charset="-122"/>
                 <a:cs typeface="Times New Roman" pitchFamily="34" charset="-120"/>
               </a:rPr>
-              <a:t>Formative quiz Part B (15 min)</a:t>
+              <a:t>Primary source reading (12 min) (cont.)</a:t>
             </a:r>
             <a:endParaRPr lang="en-US" sz="1800" dirty="0"/>
           </a:p>
@@ -4196,8 +5166,8 @@
         </p:nvSpPr>
         <p:spPr>
           <a:xfrm>
-            <a:off x="406301" y="870942"/>
-            <a:ext cx="8498026" cy="426541"/>
+            <a:off x="634901" y="883593"/>
+            <a:ext cx="8102798" cy="281880"/>
           </a:xfrm>
           <a:prstGeom prst="rect">
             <a:avLst/>
@@ -4209,20 +5179,18 @@
           <a:bodyPr wrap="square" lIns="0" tIns="0" rIns="0" bIns="0" rtlCol="0" anchor="t"/>
           <a:lstStyle/>
           <a:p>
-            <a:pPr algn="l" indent="0" marL="0">
-              <a:lnSpc>
-                <a:spcPts val="1680"/>
-              </a:lnSpc>
-              <a:spcBef>
-                <a:spcPts val="300"/>
-              </a:spcBef>
-              <a:spcAft>
-                <a:spcPts val="300"/>
-              </a:spcAft>
-              <a:buNone/>
-            </a:pPr>
-            <a:r>
-              <a:rPr lang="en-US" sz="1200" dirty="0">
+            <a:pPr algn="l" marL="342900" indent="-342900">
+              <a:lnSpc>
+                <a:spcPts val="1620"/>
+              </a:lnSpc>
+              <a:spcAft>
+                <a:spcPts val="300"/>
+              </a:spcAft>
+              <a:buSzPct val="100000"/>
+              <a:buChar char="•"/>
+            </a:pPr>
+            <a:r>
+              <a:rPr lang="en-US" sz="1200" b="1" dirty="0">
                 <a:solidFill>
                   <a:srgbClr val="1A1A1A"/>
                 </a:solidFill>
@@ -4230,7 +5198,7 @@
                 <a:ea typeface="Georgia" pitchFamily="34" charset="-122"/>
                 <a:cs typeface="Georgia" pitchFamily="34" charset="-120"/>
               </a:rPr>
-              <a:t>– 10 marks: limb identification, YS verse identification, safety question, short answer on YS 2.46 dual criterion, primary source reading question.</a:t>
+              <a:t>YS 2.50:</a:t>
             </a:r>
             <a:endParaRPr lang="en-US" sz="1200" dirty="0"/>
           </a:p>
@@ -4239,6 +5207,130 @@
       <p:sp>
         <p:nvSpPr>
           <p:cNvPr id="5" name="Text 3"/>
+          <p:cNvSpPr/>
+          <p:nvPr/>
+        </p:nvSpPr>
+        <p:spPr>
+          <a:xfrm>
+            <a:off x="406301" y="1266974"/>
+            <a:ext cx="8331398" cy="1073944"/>
+          </a:xfrm>
+          <a:prstGeom prst="rect">
+            <a:avLst/>
+          </a:prstGeom>
+          <a:solidFill>
+            <a:srgbClr val="FFFFFF"/>
+          </a:solidFill>
+          <a:ln/>
+        </p:spPr>
+        <p:txBody>
+          <a:bodyPr wrap="square" rtlCol="0" anchor="ctr"/>
+          <a:lstStyle/>
+          <a:p>
+            <a:pPr indent="0" marL="0">
+              <a:buNone/>
+            </a:pPr>
+            <a:endParaRPr lang="en-US" dirty="0"/>
+          </a:p>
+        </p:txBody>
+      </p:sp>
+      <p:sp>
+        <p:nvSpPr>
+          <p:cNvPr id="6" name="Shape 4"/>
+          <p:cNvSpPr/>
+          <p:nvPr/>
+        </p:nvSpPr>
+        <p:spPr>
+          <a:xfrm>
+            <a:off x="434876" y="1266974"/>
+            <a:ext cx="0" cy="1073944"/>
+          </a:xfrm>
+          <a:prstGeom prst="line">
+            <a:avLst/>
+          </a:prstGeom>
+          <a:noFill/>
+          <a:ln w="57150">
+            <a:solidFill>
+              <a:srgbClr val="997929"/>
+            </a:solidFill>
+            <a:prstDash val="solid"/>
+          </a:ln>
+        </p:spPr>
+      </p:sp>
+      <p:sp>
+        <p:nvSpPr>
+          <p:cNvPr id="7" name="Text 5"/>
+          <p:cNvSpPr/>
+          <p:nvPr/>
+        </p:nvSpPr>
+        <p:spPr>
+          <a:xfrm>
+            <a:off x="692051" y="1457474"/>
+            <a:ext cx="7973389" cy="692944"/>
+          </a:xfrm>
+          <a:prstGeom prst="rect">
+            <a:avLst/>
+          </a:prstGeom>
+          <a:noFill/>
+          <a:ln/>
+        </p:spPr>
+        <p:txBody>
+          <a:bodyPr wrap="square" lIns="0" tIns="0" rIns="0" bIns="0" rtlCol="0" anchor="t"/>
+          <a:lstStyle/>
+          <a:p>
+            <a:pPr algn="l" indent="0" marL="0">
+              <a:lnSpc>
+                <a:spcPts val="1820"/>
+              </a:lnSpc>
+              <a:spcBef>
+                <a:spcPts val="300"/>
+              </a:spcBef>
+              <a:spcAft>
+                <a:spcPts val="300"/>
+              </a:spcAft>
+              <a:buNone/>
+            </a:pPr>
+            <a:r>
+              <a:rPr lang="en-US" sz="1300" i="1" dirty="0">
+                <a:solidFill>
+                  <a:srgbClr val="1A1A1A"/>
+                </a:solidFill>
+                <a:latin typeface="Times New Roman" pitchFamily="34" charset="0"/>
+                <a:ea typeface="Times New Roman" pitchFamily="34" charset="-122"/>
+                <a:cs typeface="Times New Roman" pitchFamily="34" charset="-120"/>
+              </a:rPr>
+              <a:t>bāhya-ābhyantara-stambha-vṛttir deśa-kāla-saṅkhyābhiḥ paridṛṣṭo dīrgha-sūkṣmaḥ</a:t>
+            </a:r>
+            <a:pPr algn="l" indent="0" marL="0">
+              <a:lnSpc>
+                <a:spcPts val="1820"/>
+              </a:lnSpc>
+              <a:spcBef>
+                <a:spcPts val="300"/>
+              </a:spcBef>
+              <a:spcAft>
+                <a:spcPts val="300"/>
+              </a:spcAft>
+              <a:buNone/>
+            </a:pPr>
+            <a:r>
+              <a:rPr lang="en-US" sz="1300" dirty="0">
+                <a:solidFill>
+                  <a:srgbClr val="1A1A1A"/>
+                </a:solidFill>
+                <a:latin typeface="Times New Roman" pitchFamily="34" charset="0"/>
+                <a:ea typeface="Times New Roman" pitchFamily="34" charset="-122"/>
+                <a:cs typeface="Times New Roman" pitchFamily="34" charset="-120"/>
+              </a:rPr>
+              <a:t> "Prāṇāyāma has three modifications: outer (exhale), inner (inhale), and held (retained). It is observed by place, time, and number, and becomes long and subtle."</a:t>
+            </a:r>
+            <a:endParaRPr lang="en-US" sz="1300" dirty="0"/>
+          </a:p>
+        </p:txBody>
+      </p:sp>
+      <p:sp>
+        <p:nvSpPr>
+          <p:cNvPr id="8" name="Text 6"/>
           <p:cNvSpPr/>
           <p:nvPr/>
         </p:nvSpPr>
@@ -4388,7 +5480,7 @@
                 <a:ea typeface="Times New Roman" pitchFamily="34" charset="-122"/>
                 <a:cs typeface="Times New Roman" pitchFamily="34" charset="-120"/>
               </a:rPr>
-              <a:t>Wrap-up (3 min)</a:t>
+              <a:t>Primary source reading (12 min) (cont.)</a:t>
             </a:r>
             <a:endParaRPr lang="en-US" sz="1800" dirty="0"/>
           </a:p>
@@ -4402,8 +5494,8 @@
         </p:nvSpPr>
         <p:spPr>
           <a:xfrm>
-            <a:off x="406301" y="870942"/>
-            <a:ext cx="8498026" cy="213271"/>
+            <a:off x="634901" y="883593"/>
+            <a:ext cx="8102798" cy="731341"/>
           </a:xfrm>
           <a:prstGeom prst="rect">
             <a:avLst/>
@@ -4415,17 +5507,15 @@
           <a:bodyPr wrap="square" lIns="0" tIns="0" rIns="0" bIns="0" rtlCol="0" anchor="t"/>
           <a:lstStyle/>
           <a:p>
-            <a:pPr algn="l" indent="0" marL="0">
-              <a:lnSpc>
-                <a:spcPts val="1680"/>
-              </a:lnSpc>
-              <a:spcBef>
-                <a:spcPts val="300"/>
-              </a:spcBef>
-              <a:spcAft>
-                <a:spcPts val="300"/>
-              </a:spcAft>
-              <a:buNone/>
+            <a:pPr algn="l" marL="342900" indent="-342900">
+              <a:lnSpc>
+                <a:spcPts val="1620"/>
+              </a:lnSpc>
+              <a:spcAft>
+                <a:spcPts val="300"/>
+              </a:spcAft>
+              <a:buSzPct val="100000"/>
+              <a:buChar char="•"/>
             </a:pPr>
             <a:r>
               <a:rPr lang="en-US" sz="1200" dirty="0">
@@ -4436,22 +5526,23 @@
                 <a:ea typeface="Georgia" pitchFamily="34" charset="-122"/>
                 <a:cs typeface="Georgia" pitchFamily="34" charset="-120"/>
               </a:rPr>
-              <a:t>– Preview Day 6: </a:t>
-            </a:r>
-            <a:pPr algn="l" indent="0" marL="0">
-              <a:lnSpc>
-                <a:spcPts val="1680"/>
-              </a:lnSpc>
-              <a:spcBef>
-                <a:spcPts val="300"/>
-              </a:spcBef>
-              <a:spcAft>
-                <a:spcPts val="300"/>
-              </a:spcAft>
-              <a:buNone/>
-            </a:pPr>
-            <a:r>
-              <a:rPr lang="en-US" sz="1200" i="1" dirty="0">
+              <a:t>Three components: out-breath, in-breath, retention. Three measurements: place (in body), time (duration), number (count).</a:t>
+            </a:r>
+            <a:endParaRPr lang="en-US" sz="1200" dirty="0"/>
+          </a:p>
+          <a:p>
+            <a:pPr algn="l" marL="342900" indent="-342900">
+              <a:lnSpc>
+                <a:spcPts val="1620"/>
+              </a:lnSpc>
+              <a:spcAft>
+                <a:spcPts val="300"/>
+              </a:spcAft>
+              <a:buSzPct val="100000"/>
+              <a:buChar char="•"/>
+            </a:pPr>
+            <a:r>
+              <a:rPr lang="en-US" sz="1200" dirty="0">
                 <a:solidFill>
                   <a:srgbClr val="1A1A1A"/>
                 </a:solidFill>
@@ -4459,7 +5550,47 @@
                 <a:ea typeface="Georgia" pitchFamily="34" charset="-122"/>
                 <a:cs typeface="Georgia" pitchFamily="34" charset="-120"/>
               </a:rPr>
-              <a:t>"Tomorrow — the modern research framing. Polyvagal theory."</a:t>
+              <a:t>The goal: </a:t>
+            </a:r>
+            <a:pPr algn="l" indent="0" marL="0">
+              <a:lnSpc>
+                <a:spcPts val="1620"/>
+              </a:lnSpc>
+              <a:spcAft>
+                <a:spcPts val="300"/>
+              </a:spcAft>
+              <a:buNone/>
+            </a:pPr>
+            <a:r>
+              <a:rPr lang="en-US" sz="1200" i="1" dirty="0">
+                <a:solidFill>
+                  <a:srgbClr val="1A1A1A"/>
+                </a:solidFill>
+                <a:latin typeface="Georgia" pitchFamily="34" charset="0"/>
+                <a:ea typeface="Georgia" pitchFamily="34" charset="-122"/>
+                <a:cs typeface="Georgia" pitchFamily="34" charset="-120"/>
+              </a:rPr>
+              <a:t>dīrgha-sūkṣma</a:t>
+            </a:r>
+            <a:pPr algn="l" indent="0" marL="0">
+              <a:lnSpc>
+                <a:spcPts val="1620"/>
+              </a:lnSpc>
+              <a:spcAft>
+                <a:spcPts val="300"/>
+              </a:spcAft>
+              <a:buNone/>
+            </a:pPr>
+            <a:r>
+              <a:rPr lang="en-US" sz="1200" dirty="0">
+                <a:solidFill>
+                  <a:srgbClr val="1A1A1A"/>
+                </a:solidFill>
+                <a:latin typeface="Georgia" pitchFamily="34" charset="0"/>
+                <a:ea typeface="Georgia" pitchFamily="34" charset="-122"/>
+                <a:cs typeface="Georgia" pitchFamily="34" charset="-120"/>
+              </a:rPr>
+              <a:t> — long and subtle.</a:t>
             </a:r>
             <a:endParaRPr lang="en-US" sz="1200" dirty="0"/>
           </a:p>
@@ -4617,7 +5748,7 @@
                 <a:ea typeface="Times New Roman" pitchFamily="34" charset="-122"/>
                 <a:cs typeface="Times New Roman" pitchFamily="34" charset="-120"/>
               </a:rPr>
-              <a:t>Differentiation</a:t>
+              <a:t>Primary source reading (12 min) (cont.)</a:t>
             </a:r>
             <a:endParaRPr lang="en-US" sz="1800" dirty="0"/>
           </a:p>
@@ -4632,7 +5763,7 @@
         <p:spPr>
           <a:xfrm>
             <a:off x="634901" y="883593"/>
-            <a:ext cx="8102798" cy="525661"/>
+            <a:ext cx="8102798" cy="281880"/>
           </a:xfrm>
           <a:prstGeom prst="rect">
             <a:avLst/>
@@ -4663,79 +5794,139 @@
                 <a:ea typeface="Georgia" pitchFamily="34" charset="-122"/>
                 <a:cs typeface="Georgia" pitchFamily="34" charset="-120"/>
               </a:rPr>
-              <a:t>Tier up:</a:t>
-            </a:r>
+              <a:t>SB 4.8.44:</a:t>
+            </a:r>
+            <a:endParaRPr lang="en-US" sz="1200" dirty="0"/>
+          </a:p>
+        </p:txBody>
+      </p:sp>
+      <p:sp>
+        <p:nvSpPr>
+          <p:cNvPr id="5" name="Text 3"/>
+          <p:cNvSpPr/>
+          <p:nvPr/>
+        </p:nvSpPr>
+        <p:spPr>
+          <a:xfrm>
+            <a:off x="406301" y="1266974"/>
+            <a:ext cx="8331398" cy="842963"/>
+          </a:xfrm>
+          <a:prstGeom prst="rect">
+            <a:avLst/>
+          </a:prstGeom>
+          <a:solidFill>
+            <a:srgbClr val="FFFFFF"/>
+          </a:solidFill>
+          <a:ln/>
+        </p:spPr>
+        <p:txBody>
+          <a:bodyPr wrap="square" rtlCol="0" anchor="ctr"/>
+          <a:lstStyle/>
+          <a:p>
+            <a:pPr indent="0" marL="0">
+              <a:buNone/>
+            </a:pPr>
+            <a:endParaRPr lang="en-US" dirty="0"/>
+          </a:p>
+        </p:txBody>
+      </p:sp>
+      <p:sp>
+        <p:nvSpPr>
+          <p:cNvPr id="6" name="Shape 4"/>
+          <p:cNvSpPr/>
+          <p:nvPr/>
+        </p:nvSpPr>
+        <p:spPr>
+          <a:xfrm>
+            <a:off x="434876" y="1266974"/>
+            <a:ext cx="0" cy="842962"/>
+          </a:xfrm>
+          <a:prstGeom prst="line">
+            <a:avLst/>
+          </a:prstGeom>
+          <a:noFill/>
+          <a:ln w="57150">
+            <a:solidFill>
+              <a:srgbClr val="997929"/>
+            </a:solidFill>
+            <a:prstDash val="solid"/>
+          </a:ln>
+        </p:spPr>
+      </p:sp>
+      <p:sp>
+        <p:nvSpPr>
+          <p:cNvPr id="7" name="Text 5"/>
+          <p:cNvSpPr/>
+          <p:nvPr/>
+        </p:nvSpPr>
+        <p:spPr>
+          <a:xfrm>
+            <a:off x="692051" y="1457474"/>
+            <a:ext cx="7973389" cy="461963"/>
+          </a:xfrm>
+          <a:prstGeom prst="rect">
+            <a:avLst/>
+          </a:prstGeom>
+          <a:noFill/>
+          <a:ln/>
+        </p:spPr>
+        <p:txBody>
+          <a:bodyPr wrap="square" lIns="0" tIns="0" rIns="0" bIns="0" rtlCol="0" anchor="t"/>
+          <a:lstStyle/>
+          <a:p>
             <a:pPr algn="l" indent="0" marL="0">
               <a:lnSpc>
-                <a:spcPts val="1620"/>
-              </a:lnSpc>
-              <a:spcAft>
-                <a:spcPts val="300"/>
-              </a:spcAft>
-              <a:buNone/>
-            </a:pPr>
-            <a:r>
-              <a:rPr lang="en-US" sz="1200" dirty="0">
+                <a:spcPts val="1820"/>
+              </a:lnSpc>
+              <a:spcBef>
+                <a:spcPts val="300"/>
+              </a:spcBef>
+              <a:spcAft>
+                <a:spcPts val="300"/>
+              </a:spcAft>
+              <a:buNone/>
+            </a:pPr>
+            <a:r>
+              <a:rPr lang="en-US" sz="1300" i="1" dirty="0">
                 <a:solidFill>
                   <a:srgbClr val="1A1A1A"/>
                 </a:solidFill>
-                <a:latin typeface="Georgia" pitchFamily="34" charset="0"/>
-                <a:ea typeface="Georgia" pitchFamily="34" charset="-122"/>
-                <a:cs typeface="Georgia" pitchFamily="34" charset="-120"/>
-              </a:rPr>
-              <a:t> Read Bryant's commentary on YS 2.49–53. Note Vyāsa's framing of subtler prāṇāyāma practices.</a:t>
-            </a:r>
-            <a:endParaRPr lang="en-US" sz="1200" dirty="0"/>
-          </a:p>
-          <a:p>
-            <a:pPr algn="l" marL="342900" indent="-342900">
-              <a:lnSpc>
-                <a:spcPts val="1620"/>
-              </a:lnSpc>
-              <a:spcAft>
-                <a:spcPts val="300"/>
-              </a:spcAft>
-              <a:buSzPct val="100000"/>
-              <a:buChar char="•"/>
-            </a:pPr>
-            <a:r>
-              <a:rPr lang="en-US" sz="1200" b="1" dirty="0">
+                <a:latin typeface="Times New Roman" pitchFamily="34" charset="0"/>
+                <a:ea typeface="Times New Roman" pitchFamily="34" charset="-122"/>
+                <a:cs typeface="Times New Roman" pitchFamily="34" charset="-120"/>
+              </a:rPr>
+              <a:t>prāṇāyāmena tṛ-vṛtā prāṇendṛya-mano-malam śanair vyudasyābhidhyāyen manasā guruṇā gurum</a:t>
+            </a:r>
+            <a:pPr algn="l" indent="0" marL="0">
+              <a:lnSpc>
+                <a:spcPts val="1820"/>
+              </a:lnSpc>
+              <a:spcBef>
+                <a:spcPts val="300"/>
+              </a:spcBef>
+              <a:spcAft>
+                <a:spcPts val="300"/>
+              </a:spcAft>
+              <a:buNone/>
+            </a:pPr>
+            <a:r>
+              <a:rPr lang="en-US" sz="1300" dirty="0">
                 <a:solidFill>
                   <a:srgbClr val="1A1A1A"/>
                 </a:solidFill>
-                <a:latin typeface="Georgia" pitchFamily="34" charset="0"/>
-                <a:ea typeface="Georgia" pitchFamily="34" charset="-122"/>
-                <a:cs typeface="Georgia" pitchFamily="34" charset="-120"/>
-              </a:rPr>
-              <a:t>Tier down:</a:t>
-            </a:r>
-            <a:pPr algn="l" indent="0" marL="0">
-              <a:lnSpc>
-                <a:spcPts val="1620"/>
-              </a:lnSpc>
-              <a:spcAft>
-                <a:spcPts val="300"/>
-              </a:spcAft>
-              <a:buNone/>
-            </a:pPr>
-            <a:r>
-              <a:rPr lang="en-US" sz="1200" dirty="0">
-                <a:solidFill>
-                  <a:srgbClr val="1A1A1A"/>
-                </a:solidFill>
-                <a:latin typeface="Georgia" pitchFamily="34" charset="0"/>
-                <a:ea typeface="Georgia" pitchFamily="34" charset="-122"/>
-                <a:cs typeface="Georgia" pitchFamily="34" charset="-120"/>
-              </a:rPr>
-              <a:t> Stay with the natural breath; the YS verses can be re-read at home.</a:t>
-            </a:r>
-            <a:endParaRPr lang="en-US" sz="1200" dirty="0"/>
-          </a:p>
-        </p:txBody>
-      </p:sp>
-      <p:sp>
-        <p:nvSpPr>
-          <p:cNvPr id="5" name="Text 3"/>
+                <a:latin typeface="Times New Roman" pitchFamily="34" charset="0"/>
+                <a:ea typeface="Times New Roman" pitchFamily="34" charset="-122"/>
+                <a:cs typeface="Times New Roman" pitchFamily="34" charset="-120"/>
+              </a:rPr>
+              <a:t> "Through the threefold prāṇāyāma practice, one gradually purifies the breath, senses, and mind, and meditates."</a:t>
+            </a:r>
+            <a:endParaRPr lang="en-US" sz="1300" dirty="0"/>
+          </a:p>
+        </p:txBody>
+      </p:sp>
+      <p:sp>
+        <p:nvSpPr>
+          <p:cNvPr id="8" name="Text 6"/>
           <p:cNvSpPr/>
           <p:nvPr/>
         </p:nvSpPr>
